--- a/output/presentations/kontragentura_intermediate_pitch.pptx
+++ b/output/presentations/kontragentura_intermediate_pitch.pptx
@@ -2,18 +2,18 @@
 <file path=ppt/presentation.xml><?xml version="1.0" encoding="utf-8"?>
 <p:presentation xmlns:p="http://schemas.openxmlformats.org/presentationml/2006/main">
   <p:sldMasterIdLst>
-    <p:sldMasterId xmlns:r="http://schemas.openxmlformats.org/officeDocument/2006/relationships" id="2147483648" r:id="R8614b570ad80483b"/>
+    <p:sldMasterId xmlns:r="http://schemas.openxmlformats.org/officeDocument/2006/relationships" id="2147483648" r:id="Rfa7239b666ad4ba6"/>
   </p:sldMasterIdLst>
   <p:notesMasterIdLst>
-    <p:notesMasterId xmlns:r="http://schemas.openxmlformats.org/officeDocument/2006/relationships" r:id="R83c00fa652f84dea"/>
+    <p:notesMasterId xmlns:r="http://schemas.openxmlformats.org/officeDocument/2006/relationships" r:id="R575b34795d604e40"/>
   </p:notesMasterIdLst>
   <p:sldIdLst>
-    <p:sldId xmlns:r="http://schemas.openxmlformats.org/officeDocument/2006/relationships" id="256" r:id="Ree1ef8b3adc443b7"/>
-    <p:sldId xmlns:r="http://schemas.openxmlformats.org/officeDocument/2006/relationships" id="257" r:id="Rf419702377914942"/>
-    <p:sldId xmlns:r="http://schemas.openxmlformats.org/officeDocument/2006/relationships" id="258" r:id="R5fe62c4dd75a4001"/>
-    <p:sldId xmlns:r="http://schemas.openxmlformats.org/officeDocument/2006/relationships" id="259" r:id="R795aa05c9a324e8d"/>
-    <p:sldId xmlns:r="http://schemas.openxmlformats.org/officeDocument/2006/relationships" id="260" r:id="R8f890ef9a23e4e2e"/>
-    <p:sldId xmlns:r="http://schemas.openxmlformats.org/officeDocument/2006/relationships" id="261" r:id="R312e76b9ed7c4d8e"/>
+    <p:sldId xmlns:r="http://schemas.openxmlformats.org/officeDocument/2006/relationships" id="256" r:id="Rfb307e321369497d"/>
+    <p:sldId xmlns:r="http://schemas.openxmlformats.org/officeDocument/2006/relationships" id="257" r:id="R6279cea0bc0f478b"/>
+    <p:sldId xmlns:r="http://schemas.openxmlformats.org/officeDocument/2006/relationships" id="258" r:id="Rc581a7b2ea1c48d4"/>
+    <p:sldId xmlns:r="http://schemas.openxmlformats.org/officeDocument/2006/relationships" id="259" r:id="R26af79539613460e"/>
+    <p:sldId xmlns:r="http://schemas.openxmlformats.org/officeDocument/2006/relationships" id="260" r:id="R5a651235b6484a38"/>
+    <p:sldId xmlns:r="http://schemas.openxmlformats.org/officeDocument/2006/relationships" id="261" r:id="R5268bab66a144b6d"/>
   </p:sldIdLst>
   <p:sldSz cx="12192000" cy="6858000"/>
   <p:notesSz cx="6858000" cy="9144000"/>
@@ -965,7 +965,7 @@
   </p:cSld>
   <p:clrMap bg1="lt1" tx1="dk1" bg2="lt2" tx2="dk2" accent1="accent1" accent2="accent2" accent3="accent3" accent4="accent4" accent5="accent5" accent6="accent6" hlink="hlink" folHlink="folHlink"/>
   <p:sldLayoutIdLst>
-    <p:sldLayoutId xmlns:r="http://schemas.openxmlformats.org/officeDocument/2006/relationships" id="2147483649" r:id="Ra65538fab9f641ca"/>
+    <p:sldLayoutId xmlns:r="http://schemas.openxmlformats.org/officeDocument/2006/relationships" id="2147483649" r:id="R289ef36c829d4231"/>
   </p:sldLayoutIdLst>
   <p:txStyles>
     <p:titleStyle>
@@ -1703,6 +1703,7 @@
           <a:lstStyle xmlns:a="http://schemas.openxmlformats.org/drawingml/2006/main"/>
           <a:p xmlns:a="http://schemas.openxmlformats.org/drawingml/2006/main">
             <a:pPr algn="ctr">
+              <a:buNone/>
               <a:defRPr sz="1350">
                 <a:solidFill>
                   <a:srgbClr val="171717"/>
@@ -1930,15 +1931,12 @@
               </a:defRPr>
             </a:pPr>
             <a:r>
-              <a:rPr sz="1800" b="0">
-                <a:solidFill>
-                  <a:srgbClr val="171717"/>
-                </a:solidFill>
-                <a:latin typeface="Arial"/>
-                <a:ea typeface="Arial"/>
-                <a:cs typeface="Arial"/>
-              </a:rPr>
-              <a:t>ИИ-агент по ИНН · промежуточная версия</a:t>
+              <a:rPr sz="1800" b="1">
+                <a:latin typeface="Arial"/>
+                <a:ea typeface="Arial"/>
+                <a:cs typeface="Arial"/>
+              </a:rPr>
+              <a:t>КЕЙСОДАТЕЛЬ · АЛЬФА-БАНК</a:t>
             </a:r>
           </a:p>
         </p:txBody>
@@ -2352,6 +2350,7 @@
           <a:lstStyle xmlns:a="http://schemas.openxmlformats.org/drawingml/2006/main"/>
           <a:p xmlns:a="http://schemas.openxmlformats.org/drawingml/2006/main">
             <a:pPr algn="ctr">
+              <a:buNone/>
               <a:defRPr sz="975" b="1">
                 <a:solidFill>
                   <a:srgbClr val="171717"/>
@@ -2518,14 +2517,11 @@
             </a:pPr>
             <a:r>
               <a:rPr sz="1350" b="0">
-                <a:solidFill>
-                  <a:srgbClr val="5F6470"/>
-                </a:solidFill>
-                <a:latin typeface="Arial"/>
-                <a:ea typeface="Arial"/>
-                <a:cs typeface="Arial"/>
-              </a:rPr>
-              <a:t>Три участника · зоны ответственности · активное участие</a:t>
+                <a:latin typeface="Arial"/>
+                <a:ea typeface="Arial"/>
+                <a:cs typeface="Arial"/>
+              </a:rPr>
+              <a:t>Три участника · роли и зоны ответственности</a:t>
             </a:r>
           </a:p>
         </p:txBody>
@@ -3051,28 +3047,28 @@
       </p:sp>
       <p:sp>
         <p:nvSpPr>
-          <p:cNvPr id="16" name="">
-            <a:extLst xmlns:a="http://schemas.openxmlformats.org/drawingml/2006/main">
-              <a:ext uri="{FF2B5EF4-FFF2-40B4-BE49-F238E27FC236}">
-                <a16:creationId xmlns:a16="http://schemas.microsoft.com/office/drawing/2014/main" id="{5315BB5F-F322-48A5-A283-E3EFC76581AA}"/>
-              </a:ext>
-            </a:extLst>
-          </p:cNvPr>
-          <p:cNvSpPr>
-            <a:spLocks xmlns:a="http://schemas.openxmlformats.org/drawingml/2006/main" noGrp="1"/>
-          </p:cNvSpPr>
-          <p:nvPr/>
-        </p:nvSpPr>
-        <p:spPr>
-          <a:xfrm xmlns:a="http://schemas.openxmlformats.org/drawingml/2006/main">
-            <a:off x="8172450" y="2371725"/>
-            <a:ext cx="95250" cy="95250"/>
-          </a:xfrm>
-          <a:prstGeom xmlns:a="http://schemas.openxmlformats.org/drawingml/2006/main" prst="ellipse">
+          <p:cNvPr id="18" name="">
+            <a:extLst xmlns:a="http://schemas.openxmlformats.org/drawingml/2006/main">
+              <a:ext uri="{FF2B5EF4-FFF2-40B4-BE49-F238E27FC236}">
+                <a16:creationId xmlns:a16="http://schemas.microsoft.com/office/drawing/2014/main" id="{4669DA61-281B-4FDC-88B1-99DC3C53AC80}"/>
+              </a:ext>
+            </a:extLst>
+          </p:cNvPr>
+          <p:cNvSpPr>
+            <a:spLocks xmlns:a="http://schemas.openxmlformats.org/drawingml/2006/main" noGrp="1"/>
+          </p:cNvSpPr>
+          <p:nvPr/>
+        </p:nvSpPr>
+        <p:spPr>
+          <a:xfrm xmlns:a="http://schemas.openxmlformats.org/drawingml/2006/main">
+            <a:off x="685800" y="3209925"/>
+            <a:ext cx="8496300" cy="11430"/>
+          </a:xfrm>
+          <a:prstGeom xmlns:a="http://schemas.openxmlformats.org/drawingml/2006/main" prst="rect">
             <a:avLst/>
           </a:prstGeom>
           <a:solidFill xmlns:a="http://schemas.openxmlformats.org/drawingml/2006/main">
-            <a:srgbClr val="E52B2F"/>
+            <a:srgbClr val="D9D5CC"/>
           </a:solidFill>
           <a:ln xmlns:a="http://schemas.openxmlformats.org/drawingml/2006/main" w="0">
             <a:noFill/>
@@ -3082,22 +3078,22 @@
       </p:sp>
       <p:sp>
         <p:nvSpPr>
-          <p:cNvPr id="17" name="">
-            <a:extLst xmlns:a="http://schemas.openxmlformats.org/drawingml/2006/main">
-              <a:ext uri="{FF2B5EF4-FFF2-40B4-BE49-F238E27FC236}">
-                <a16:creationId xmlns:a16="http://schemas.microsoft.com/office/drawing/2014/main" id="{2DDE636A-9448-4127-9F75-3D0524F1F221}"/>
-              </a:ext>
-            </a:extLst>
-          </p:cNvPr>
-          <p:cNvSpPr>
-            <a:spLocks xmlns:a="http://schemas.openxmlformats.org/drawingml/2006/main" noGrp="1"/>
-          </p:cNvSpPr>
-          <p:nvPr/>
-        </p:nvSpPr>
-        <p:spPr>
-          <a:xfrm xmlns:a="http://schemas.openxmlformats.org/drawingml/2006/main">
-            <a:off x="8362950" y="2314575"/>
-            <a:ext cx="876300" cy="228600"/>
+          <p:cNvPr id="19" name="">
+            <a:extLst xmlns:a="http://schemas.openxmlformats.org/drawingml/2006/main">
+              <a:ext uri="{FF2B5EF4-FFF2-40B4-BE49-F238E27FC236}">
+                <a16:creationId xmlns:a16="http://schemas.microsoft.com/office/drawing/2014/main" id="{AD6A1EA9-A4A0-46E4-9501-562DA74D23EB}"/>
+              </a:ext>
+            </a:extLst>
+          </p:cNvPr>
+          <p:cNvSpPr>
+            <a:spLocks xmlns:a="http://schemas.openxmlformats.org/drawingml/2006/main" noGrp="1"/>
+          </p:cNvSpPr>
+          <p:nvPr/>
+        </p:nvSpPr>
+        <p:spPr>
+          <a:xfrm xmlns:a="http://schemas.openxmlformats.org/drawingml/2006/main">
+            <a:off x="685800" y="3629025"/>
+            <a:ext cx="628650" cy="476250"/>
           </a:xfrm>
           <a:prstGeom xmlns:a="http://schemas.openxmlformats.org/drawingml/2006/main" prst="rect">
             <a:avLst/>
@@ -3119,7 +3115,193 @@
                 <a:spcPct val="100000"/>
               </a:lnSpc>
               <a:buNone/>
-              <a:defRPr sz="1125" b="1">
+              <a:defRPr sz="2625" b="1">
+                <a:solidFill>
+                  <a:srgbClr val="F6B800"/>
+                </a:solidFill>
+                <a:latin typeface="Georgia"/>
+                <a:ea typeface="Georgia"/>
+                <a:cs typeface="Georgia"/>
+              </a:defRPr>
+            </a:pPr>
+            <a:r>
+              <a:rPr sz="2625" b="1">
+                <a:solidFill>
+                  <a:srgbClr val="F6B800"/>
+                </a:solidFill>
+                <a:latin typeface="Georgia"/>
+                <a:ea typeface="Georgia"/>
+                <a:cs typeface="Georgia"/>
+              </a:rPr>
+              <a:t>02</a:t>
+            </a:r>
+          </a:p>
+        </p:txBody>
+      </p:sp>
+      <p:sp>
+        <p:nvSpPr>
+          <p:cNvPr id="20" name="">
+            <a:extLst xmlns:a="http://schemas.openxmlformats.org/drawingml/2006/main">
+              <a:ext uri="{FF2B5EF4-FFF2-40B4-BE49-F238E27FC236}">
+                <a16:creationId xmlns:a16="http://schemas.microsoft.com/office/drawing/2014/main" id="{BDA430BC-563F-44EF-A286-E040585D9310}"/>
+              </a:ext>
+            </a:extLst>
+          </p:cNvPr>
+          <p:cNvSpPr>
+            <a:spLocks xmlns:a="http://schemas.openxmlformats.org/drawingml/2006/main" noGrp="1"/>
+          </p:cNvSpPr>
+          <p:nvPr/>
+        </p:nvSpPr>
+        <p:spPr>
+          <a:xfrm xmlns:a="http://schemas.openxmlformats.org/drawingml/2006/main">
+            <a:off x="1466850" y="3609975"/>
+            <a:ext cx="2857500" cy="381000"/>
+          </a:xfrm>
+          <a:prstGeom xmlns:a="http://schemas.openxmlformats.org/drawingml/2006/main" prst="rect">
+            <a:avLst/>
+          </a:prstGeom>
+          <a:noFill xmlns:a="http://schemas.openxmlformats.org/drawingml/2006/main"/>
+          <a:ln xmlns:a="http://schemas.openxmlformats.org/drawingml/2006/main" w="0">
+            <a:noFill/>
+            <a:prstDash val="solid"/>
+          </a:ln>
+        </p:spPr>
+        <p:txBody>
+          <a:bodyPr xmlns:a="http://schemas.openxmlformats.org/drawingml/2006/main" lIns="0" tIns="0" rIns="0" bIns="0" anchor="t">
+            <a:normAutofit fontScale="100000"/>
+          </a:bodyPr>
+          <a:lstStyle xmlns:a="http://schemas.openxmlformats.org/drawingml/2006/main"/>
+          <a:p xmlns:a="http://schemas.openxmlformats.org/drawingml/2006/main">
+            <a:pPr algn="l">
+              <a:lnSpc>
+                <a:spcPct val="100000"/>
+              </a:lnSpc>
+              <a:buNone/>
+              <a:defRPr sz="2175" b="1">
+                <a:solidFill>
+                  <a:srgbClr val="063F8C"/>
+                </a:solidFill>
+                <a:latin typeface="Georgia"/>
+                <a:ea typeface="Georgia"/>
+                <a:cs typeface="Georgia"/>
+              </a:defRPr>
+            </a:pPr>
+            <a:r>
+              <a:rPr sz="2175" b="1">
+                <a:solidFill>
+                  <a:srgbClr val="063F8C"/>
+                </a:solidFill>
+                <a:latin typeface="Georgia"/>
+                <a:ea typeface="Georgia"/>
+                <a:cs typeface="Georgia"/>
+              </a:rPr>
+              <a:t>Рожков Александр</a:t>
+            </a:r>
+          </a:p>
+        </p:txBody>
+      </p:sp>
+      <p:sp>
+        <p:nvSpPr>
+          <p:cNvPr id="21" name="">
+            <a:extLst xmlns:a="http://schemas.openxmlformats.org/drawingml/2006/main">
+              <a:ext uri="{FF2B5EF4-FFF2-40B4-BE49-F238E27FC236}">
+                <a16:creationId xmlns:a16="http://schemas.microsoft.com/office/drawing/2014/main" id="{D3C7C0BB-41CA-4701-BF2D-F263FA1FE953}"/>
+              </a:ext>
+            </a:extLst>
+          </p:cNvPr>
+          <p:cNvSpPr>
+            <a:spLocks xmlns:a="http://schemas.openxmlformats.org/drawingml/2006/main" noGrp="1"/>
+          </p:cNvSpPr>
+          <p:nvPr/>
+        </p:nvSpPr>
+        <p:spPr>
+          <a:xfrm xmlns:a="http://schemas.openxmlformats.org/drawingml/2006/main">
+            <a:off x="1476375" y="4029075"/>
+            <a:ext cx="2762250" cy="209550"/>
+          </a:xfrm>
+          <a:prstGeom xmlns:a="http://schemas.openxmlformats.org/drawingml/2006/main" prst="rect">
+            <a:avLst/>
+          </a:prstGeom>
+          <a:noFill xmlns:a="http://schemas.openxmlformats.org/drawingml/2006/main"/>
+          <a:ln xmlns:a="http://schemas.openxmlformats.org/drawingml/2006/main" w="0">
+            <a:noFill/>
+            <a:prstDash val="solid"/>
+          </a:ln>
+        </p:spPr>
+        <p:txBody>
+          <a:bodyPr xmlns:a="http://schemas.openxmlformats.org/drawingml/2006/main" lIns="0" tIns="0" rIns="0" bIns="0" anchor="t">
+            <a:normAutofit fontScale="100000"/>
+          </a:bodyPr>
+          <a:lstStyle xmlns:a="http://schemas.openxmlformats.org/drawingml/2006/main"/>
+          <a:p xmlns:a="http://schemas.openxmlformats.org/drawingml/2006/main">
+            <a:pPr algn="l">
+              <a:lnSpc>
+                <a:spcPct val="100000"/>
+              </a:lnSpc>
+              <a:buNone/>
+              <a:defRPr sz="1050" b="1">
+                <a:solidFill>
+                  <a:srgbClr val="E52B2F"/>
+                </a:solidFill>
+                <a:latin typeface="Arial"/>
+                <a:ea typeface="Arial"/>
+                <a:cs typeface="Arial"/>
+              </a:defRPr>
+            </a:pPr>
+            <a:r>
+              <a:rPr sz="1050" b="1">
+                <a:solidFill>
+                  <a:srgbClr val="E52B2F"/>
+                </a:solidFill>
+                <a:latin typeface="Arial"/>
+                <a:ea typeface="Arial"/>
+                <a:cs typeface="Arial"/>
+              </a:rPr>
+              <a:t>DATA · BACKEND</a:t>
+            </a:r>
+          </a:p>
+        </p:txBody>
+      </p:sp>
+      <p:sp>
+        <p:nvSpPr>
+          <p:cNvPr id="22" name="">
+            <a:extLst xmlns:a="http://schemas.openxmlformats.org/drawingml/2006/main">
+              <a:ext uri="{FF2B5EF4-FFF2-40B4-BE49-F238E27FC236}">
+                <a16:creationId xmlns:a16="http://schemas.microsoft.com/office/drawing/2014/main" id="{13DBEEBF-8A95-4128-8F0C-E492C97119C3}"/>
+              </a:ext>
+            </a:extLst>
+          </p:cNvPr>
+          <p:cNvSpPr>
+            <a:spLocks xmlns:a="http://schemas.openxmlformats.org/drawingml/2006/main" noGrp="1"/>
+          </p:cNvSpPr>
+          <p:nvPr/>
+        </p:nvSpPr>
+        <p:spPr>
+          <a:xfrm xmlns:a="http://schemas.openxmlformats.org/drawingml/2006/main">
+            <a:off x="4476750" y="3648075"/>
+            <a:ext cx="3524250" cy="533400"/>
+          </a:xfrm>
+          <a:prstGeom xmlns:a="http://schemas.openxmlformats.org/drawingml/2006/main" prst="rect">
+            <a:avLst/>
+          </a:prstGeom>
+          <a:noFill xmlns:a="http://schemas.openxmlformats.org/drawingml/2006/main"/>
+          <a:ln xmlns:a="http://schemas.openxmlformats.org/drawingml/2006/main" w="0">
+            <a:noFill/>
+            <a:prstDash val="solid"/>
+          </a:ln>
+        </p:spPr>
+        <p:txBody>
+          <a:bodyPr xmlns:a="http://schemas.openxmlformats.org/drawingml/2006/main" lIns="0" tIns="0" rIns="0" bIns="0" anchor="t">
+            <a:normAutofit fontScale="100000"/>
+          </a:bodyPr>
+          <a:lstStyle xmlns:a="http://schemas.openxmlformats.org/drawingml/2006/main"/>
+          <a:p xmlns:a="http://schemas.openxmlformats.org/drawingml/2006/main">
+            <a:pPr algn="l">
+              <a:lnSpc>
+                <a:spcPct val="108000"/>
+              </a:lnSpc>
+              <a:buNone/>
+              <a:defRPr sz="1350" b="0">
                 <a:solidFill>
                   <a:srgbClr val="171717"/>
                 </a:solidFill>
@@ -3129,7 +3311,7 @@
               </a:defRPr>
             </a:pPr>
             <a:r>
-              <a:rPr sz="1125" b="1">
+              <a:rPr sz="1350" b="0">
                 <a:solidFill>
                   <a:srgbClr val="171717"/>
                 </a:solidFill>
@@ -3137,28 +3319,28 @@
                 <a:ea typeface="Arial"/>
                 <a:cs typeface="Arial"/>
               </a:rPr>
-              <a:t>активное</a:t>
-            </a:r>
-          </a:p>
-        </p:txBody>
-      </p:sp>
-      <p:sp>
-        <p:nvSpPr>
-          <p:cNvPr id="18" name="">
-            <a:extLst xmlns:a="http://schemas.openxmlformats.org/drawingml/2006/main">
-              <a:ext uri="{FF2B5EF4-FFF2-40B4-BE49-F238E27FC236}">
-                <a16:creationId xmlns:a16="http://schemas.microsoft.com/office/drawing/2014/main" id="{4669DA61-281B-4FDC-88B1-99DC3C53AC80}"/>
-              </a:ext>
-            </a:extLst>
-          </p:cNvPr>
-          <p:cNvSpPr>
-            <a:spLocks xmlns:a="http://schemas.openxmlformats.org/drawingml/2006/main" noGrp="1"/>
-          </p:cNvSpPr>
-          <p:nvPr/>
-        </p:nvSpPr>
-        <p:spPr>
-          <a:xfrm xmlns:a="http://schemas.openxmlformats.org/drawingml/2006/main">
-            <a:off x="685800" y="3209925"/>
+              <a:t>Анализ 100 карточек, БД, слой фактов, API и тесты</a:t>
+            </a:r>
+          </a:p>
+        </p:txBody>
+      </p:sp>
+      <p:sp>
+        <p:nvSpPr>
+          <p:cNvPr id="25" name="">
+            <a:extLst xmlns:a="http://schemas.openxmlformats.org/drawingml/2006/main">
+              <a:ext uri="{FF2B5EF4-FFF2-40B4-BE49-F238E27FC236}">
+                <a16:creationId xmlns:a16="http://schemas.microsoft.com/office/drawing/2014/main" id="{4B0C27AF-CA5E-4108-94D6-76D05862C015}"/>
+              </a:ext>
+            </a:extLst>
+          </p:cNvPr>
+          <p:cNvSpPr>
+            <a:spLocks xmlns:a="http://schemas.openxmlformats.org/drawingml/2006/main" noGrp="1"/>
+          </p:cNvSpPr>
+          <p:nvPr/>
+        </p:nvSpPr>
+        <p:spPr>
+          <a:xfrm xmlns:a="http://schemas.openxmlformats.org/drawingml/2006/main">
+            <a:off x="685800" y="4591050"/>
             <a:ext cx="8496300" cy="11430"/>
           </a:xfrm>
           <a:prstGeom xmlns:a="http://schemas.openxmlformats.org/drawingml/2006/main" prst="rect">
@@ -3175,21 +3357,21 @@
       </p:sp>
       <p:sp>
         <p:nvSpPr>
-          <p:cNvPr id="19" name="">
-            <a:extLst xmlns:a="http://schemas.openxmlformats.org/drawingml/2006/main">
-              <a:ext uri="{FF2B5EF4-FFF2-40B4-BE49-F238E27FC236}">
-                <a16:creationId xmlns:a16="http://schemas.microsoft.com/office/drawing/2014/main" id="{AD6A1EA9-A4A0-46E4-9501-562DA74D23EB}"/>
-              </a:ext>
-            </a:extLst>
-          </p:cNvPr>
-          <p:cNvSpPr>
-            <a:spLocks xmlns:a="http://schemas.openxmlformats.org/drawingml/2006/main" noGrp="1"/>
-          </p:cNvSpPr>
-          <p:nvPr/>
-        </p:nvSpPr>
-        <p:spPr>
-          <a:xfrm xmlns:a="http://schemas.openxmlformats.org/drawingml/2006/main">
-            <a:off x="685800" y="3629025"/>
+          <p:cNvPr id="26" name="">
+            <a:extLst xmlns:a="http://schemas.openxmlformats.org/drawingml/2006/main">
+              <a:ext uri="{FF2B5EF4-FFF2-40B4-BE49-F238E27FC236}">
+                <a16:creationId xmlns:a16="http://schemas.microsoft.com/office/drawing/2014/main" id="{90A94389-E80E-495A-9AA4-E063C3297EAF}"/>
+              </a:ext>
+            </a:extLst>
+          </p:cNvPr>
+          <p:cNvSpPr>
+            <a:spLocks xmlns:a="http://schemas.openxmlformats.org/drawingml/2006/main" noGrp="1"/>
+          </p:cNvSpPr>
+          <p:nvPr/>
+        </p:nvSpPr>
+        <p:spPr>
+          <a:xfrm xmlns:a="http://schemas.openxmlformats.org/drawingml/2006/main">
+            <a:off x="685800" y="5010150"/>
             <a:ext cx="628650" cy="476250"/>
           </a:xfrm>
           <a:prstGeom xmlns:a="http://schemas.openxmlformats.org/drawingml/2006/main" prst="rect">
@@ -3230,29 +3412,29 @@
                 <a:ea typeface="Georgia"/>
                 <a:cs typeface="Georgia"/>
               </a:rPr>
-              <a:t>02</a:t>
-            </a:r>
-          </a:p>
-        </p:txBody>
-      </p:sp>
-      <p:sp>
-        <p:nvSpPr>
-          <p:cNvPr id="20" name="">
-            <a:extLst xmlns:a="http://schemas.openxmlformats.org/drawingml/2006/main">
-              <a:ext uri="{FF2B5EF4-FFF2-40B4-BE49-F238E27FC236}">
-                <a16:creationId xmlns:a16="http://schemas.microsoft.com/office/drawing/2014/main" id="{BDA430BC-563F-44EF-A286-E040585D9310}"/>
-              </a:ext>
-            </a:extLst>
-          </p:cNvPr>
-          <p:cNvSpPr>
-            <a:spLocks xmlns:a="http://schemas.openxmlformats.org/drawingml/2006/main" noGrp="1"/>
-          </p:cNvSpPr>
-          <p:nvPr/>
-        </p:nvSpPr>
-        <p:spPr>
-          <a:xfrm xmlns:a="http://schemas.openxmlformats.org/drawingml/2006/main">
-            <a:off x="1466850" y="3609975"/>
-            <a:ext cx="2857500" cy="381000"/>
+              <a:t>03</a:t>
+            </a:r>
+          </a:p>
+        </p:txBody>
+      </p:sp>
+      <p:sp>
+        <p:nvSpPr>
+          <p:cNvPr id="27" name="">
+            <a:extLst xmlns:a="http://schemas.openxmlformats.org/drawingml/2006/main">
+              <a:ext uri="{FF2B5EF4-FFF2-40B4-BE49-F238E27FC236}">
+                <a16:creationId xmlns:a16="http://schemas.microsoft.com/office/drawing/2014/main" id="{C5345519-BCEE-4DB5-9723-B23B0CC21BC3}"/>
+              </a:ext>
+            </a:extLst>
+          </p:cNvPr>
+          <p:cNvSpPr>
+            <a:spLocks xmlns:a="http://schemas.openxmlformats.org/drawingml/2006/main" noGrp="1"/>
+          </p:cNvSpPr>
+          <p:nvPr/>
+        </p:nvSpPr>
+        <p:spPr>
+          <a:xfrm xmlns:a="http://schemas.openxmlformats.org/drawingml/2006/main">
+            <a:off x="1466850" y="4991100"/>
+            <a:ext cx="3009900" cy="381000"/>
           </a:xfrm>
           <a:prstGeom xmlns:a="http://schemas.openxmlformats.org/drawingml/2006/main" prst="rect">
             <a:avLst/>
@@ -3274,7 +3456,7 @@
                 <a:spcPct val="100000"/>
               </a:lnSpc>
               <a:buNone/>
-              <a:defRPr sz="2175" b="1">
+              <a:defRPr sz="1950" b="1">
                 <a:solidFill>
                   <a:srgbClr val="063F8C"/>
                 </a:solidFill>
@@ -3284,7 +3466,7 @@
               </a:defRPr>
             </a:pPr>
             <a:r>
-              <a:rPr sz="2175" b="1">
+              <a:rPr sz="1950" b="1">
                 <a:solidFill>
                   <a:srgbClr val="063F8C"/>
                 </a:solidFill>
@@ -3292,28 +3474,28 @@
                 <a:ea typeface="Georgia"/>
                 <a:cs typeface="Georgia"/>
               </a:rPr>
-              <a:t>Рожков Александр</a:t>
-            </a:r>
-          </a:p>
-        </p:txBody>
-      </p:sp>
-      <p:sp>
-        <p:nvSpPr>
-          <p:cNvPr id="21" name="">
-            <a:extLst xmlns:a="http://schemas.openxmlformats.org/drawingml/2006/main">
-              <a:ext uri="{FF2B5EF4-FFF2-40B4-BE49-F238E27FC236}">
-                <a16:creationId xmlns:a16="http://schemas.microsoft.com/office/drawing/2014/main" id="{D3C7C0BB-41CA-4701-BF2D-F263FA1FE953}"/>
-              </a:ext>
-            </a:extLst>
-          </p:cNvPr>
-          <p:cNvSpPr>
-            <a:spLocks xmlns:a="http://schemas.openxmlformats.org/drawingml/2006/main" noGrp="1"/>
-          </p:cNvSpPr>
-          <p:nvPr/>
-        </p:nvSpPr>
-        <p:spPr>
-          <a:xfrm xmlns:a="http://schemas.openxmlformats.org/drawingml/2006/main">
-            <a:off x="1476375" y="4029075"/>
+              <a:t>Нигматуллин Амир</a:t>
+            </a:r>
+          </a:p>
+        </p:txBody>
+      </p:sp>
+      <p:sp>
+        <p:nvSpPr>
+          <p:cNvPr id="28" name="">
+            <a:extLst xmlns:a="http://schemas.openxmlformats.org/drawingml/2006/main">
+              <a:ext uri="{FF2B5EF4-FFF2-40B4-BE49-F238E27FC236}">
+                <a16:creationId xmlns:a16="http://schemas.microsoft.com/office/drawing/2014/main" id="{3473D998-6C97-4F69-A007-060B172B458F}"/>
+              </a:ext>
+            </a:extLst>
+          </p:cNvPr>
+          <p:cNvSpPr>
+            <a:spLocks xmlns:a="http://schemas.openxmlformats.org/drawingml/2006/main" noGrp="1"/>
+          </p:cNvSpPr>
+          <p:nvPr/>
+        </p:nvSpPr>
+        <p:spPr>
+          <a:xfrm xmlns:a="http://schemas.openxmlformats.org/drawingml/2006/main">
+            <a:off x="1476375" y="5410200"/>
             <a:ext cx="2762250" cy="209550"/>
           </a:xfrm>
           <a:prstGeom xmlns:a="http://schemas.openxmlformats.org/drawingml/2006/main" prst="rect">
@@ -3354,28 +3536,28 @@
                 <a:ea typeface="Arial"/>
                 <a:cs typeface="Arial"/>
               </a:rPr>
-              <a:t>DATA · BACKEND</a:t>
-            </a:r>
-          </a:p>
-        </p:txBody>
-      </p:sp>
-      <p:sp>
-        <p:nvSpPr>
-          <p:cNvPr id="22" name="">
-            <a:extLst xmlns:a="http://schemas.openxmlformats.org/drawingml/2006/main">
-              <a:ext uri="{FF2B5EF4-FFF2-40B4-BE49-F238E27FC236}">
-                <a16:creationId xmlns:a16="http://schemas.microsoft.com/office/drawing/2014/main" id="{13DBEEBF-8A95-4128-8F0C-E492C97119C3}"/>
-              </a:ext>
-            </a:extLst>
-          </p:cNvPr>
-          <p:cNvSpPr>
-            <a:spLocks xmlns:a="http://schemas.openxmlformats.org/drawingml/2006/main" noGrp="1"/>
-          </p:cNvSpPr>
-          <p:nvPr/>
-        </p:nvSpPr>
-        <p:spPr>
-          <a:xfrm xmlns:a="http://schemas.openxmlformats.org/drawingml/2006/main">
-            <a:off x="4476750" y="3648075"/>
+              <a:t>LLM ENGINEERING · FRONTEND</a:t>
+            </a:r>
+          </a:p>
+        </p:txBody>
+      </p:sp>
+      <p:sp>
+        <p:nvSpPr>
+          <p:cNvPr id="29" name="">
+            <a:extLst xmlns:a="http://schemas.openxmlformats.org/drawingml/2006/main">
+              <a:ext uri="{FF2B5EF4-FFF2-40B4-BE49-F238E27FC236}">
+                <a16:creationId xmlns:a16="http://schemas.microsoft.com/office/drawing/2014/main" id="{1B14A354-B224-46C6-BD9F-BACC968C282D}"/>
+              </a:ext>
+            </a:extLst>
+          </p:cNvPr>
+          <p:cNvSpPr>
+            <a:spLocks xmlns:a="http://schemas.openxmlformats.org/drawingml/2006/main" noGrp="1"/>
+          </p:cNvSpPr>
+          <p:nvPr/>
+        </p:nvSpPr>
+        <p:spPr>
+          <a:xfrm xmlns:a="http://schemas.openxmlformats.org/drawingml/2006/main">
+            <a:off x="4476750" y="5029200"/>
             <a:ext cx="3524250" cy="533400"/>
           </a:xfrm>
           <a:prstGeom xmlns:a="http://schemas.openxmlformats.org/drawingml/2006/main" prst="rect">
@@ -3416,472 +3598,7 @@
                 <a:ea typeface="Arial"/>
                 <a:cs typeface="Arial"/>
               </a:rPr>
-              <a:t>Анализ 100 карточек, БД, слой фактов, API и тесты</a:t>
-            </a:r>
-          </a:p>
-        </p:txBody>
-      </p:sp>
-      <p:sp>
-        <p:nvSpPr>
-          <p:cNvPr id="23" name="">
-            <a:extLst xmlns:a="http://schemas.openxmlformats.org/drawingml/2006/main">
-              <a:ext uri="{FF2B5EF4-FFF2-40B4-BE49-F238E27FC236}">
-                <a16:creationId xmlns:a16="http://schemas.microsoft.com/office/drawing/2014/main" id="{320271AB-426F-48F7-8670-7029EF9173D4}"/>
-              </a:ext>
-            </a:extLst>
-          </p:cNvPr>
-          <p:cNvSpPr>
-            <a:spLocks xmlns:a="http://schemas.openxmlformats.org/drawingml/2006/main" noGrp="1"/>
-          </p:cNvSpPr>
-          <p:nvPr/>
-        </p:nvSpPr>
-        <p:spPr>
-          <a:xfrm xmlns:a="http://schemas.openxmlformats.org/drawingml/2006/main">
-            <a:off x="8172450" y="3752850"/>
-            <a:ext cx="95250" cy="95250"/>
-          </a:xfrm>
-          <a:prstGeom xmlns:a="http://schemas.openxmlformats.org/drawingml/2006/main" prst="ellipse">
-            <a:avLst/>
-          </a:prstGeom>
-          <a:solidFill xmlns:a="http://schemas.openxmlformats.org/drawingml/2006/main">
-            <a:srgbClr val="E52B2F"/>
-          </a:solidFill>
-          <a:ln xmlns:a="http://schemas.openxmlformats.org/drawingml/2006/main" w="0">
-            <a:noFill/>
-            <a:prstDash val="solid"/>
-          </a:ln>
-        </p:spPr>
-      </p:sp>
-      <p:sp>
-        <p:nvSpPr>
-          <p:cNvPr id="24" name="">
-            <a:extLst xmlns:a="http://schemas.openxmlformats.org/drawingml/2006/main">
-              <a:ext uri="{FF2B5EF4-FFF2-40B4-BE49-F238E27FC236}">
-                <a16:creationId xmlns:a16="http://schemas.microsoft.com/office/drawing/2014/main" id="{37F2A3BD-2C01-4018-BE4B-48FA58E35FAF}"/>
-              </a:ext>
-            </a:extLst>
-          </p:cNvPr>
-          <p:cNvSpPr>
-            <a:spLocks xmlns:a="http://schemas.openxmlformats.org/drawingml/2006/main" noGrp="1"/>
-          </p:cNvSpPr>
-          <p:nvPr/>
-        </p:nvSpPr>
-        <p:spPr>
-          <a:xfrm xmlns:a="http://schemas.openxmlformats.org/drawingml/2006/main">
-            <a:off x="8362950" y="3695700"/>
-            <a:ext cx="876300" cy="228600"/>
-          </a:xfrm>
-          <a:prstGeom xmlns:a="http://schemas.openxmlformats.org/drawingml/2006/main" prst="rect">
-            <a:avLst/>
-          </a:prstGeom>
-          <a:noFill xmlns:a="http://schemas.openxmlformats.org/drawingml/2006/main"/>
-          <a:ln xmlns:a="http://schemas.openxmlformats.org/drawingml/2006/main" w="0">
-            <a:noFill/>
-            <a:prstDash val="solid"/>
-          </a:ln>
-        </p:spPr>
-        <p:txBody>
-          <a:bodyPr xmlns:a="http://schemas.openxmlformats.org/drawingml/2006/main" lIns="0" tIns="0" rIns="0" bIns="0" anchor="t">
-            <a:normAutofit fontScale="100000"/>
-          </a:bodyPr>
-          <a:lstStyle xmlns:a="http://schemas.openxmlformats.org/drawingml/2006/main"/>
-          <a:p xmlns:a="http://schemas.openxmlformats.org/drawingml/2006/main">
-            <a:pPr algn="l">
-              <a:lnSpc>
-                <a:spcPct val="100000"/>
-              </a:lnSpc>
-              <a:buNone/>
-              <a:defRPr sz="1125" b="1">
-                <a:solidFill>
-                  <a:srgbClr val="171717"/>
-                </a:solidFill>
-                <a:latin typeface="Arial"/>
-                <a:ea typeface="Arial"/>
-                <a:cs typeface="Arial"/>
-              </a:defRPr>
-            </a:pPr>
-            <a:r>
-              <a:rPr sz="1125" b="1">
-                <a:solidFill>
-                  <a:srgbClr val="171717"/>
-                </a:solidFill>
-                <a:latin typeface="Arial"/>
-                <a:ea typeface="Arial"/>
-                <a:cs typeface="Arial"/>
-              </a:rPr>
-              <a:t>активное</a:t>
-            </a:r>
-          </a:p>
-        </p:txBody>
-      </p:sp>
-      <p:sp>
-        <p:nvSpPr>
-          <p:cNvPr id="25" name="">
-            <a:extLst xmlns:a="http://schemas.openxmlformats.org/drawingml/2006/main">
-              <a:ext uri="{FF2B5EF4-FFF2-40B4-BE49-F238E27FC236}">
-                <a16:creationId xmlns:a16="http://schemas.microsoft.com/office/drawing/2014/main" id="{4B0C27AF-CA5E-4108-94D6-76D05862C015}"/>
-              </a:ext>
-            </a:extLst>
-          </p:cNvPr>
-          <p:cNvSpPr>
-            <a:spLocks xmlns:a="http://schemas.openxmlformats.org/drawingml/2006/main" noGrp="1"/>
-          </p:cNvSpPr>
-          <p:nvPr/>
-        </p:nvSpPr>
-        <p:spPr>
-          <a:xfrm xmlns:a="http://schemas.openxmlformats.org/drawingml/2006/main">
-            <a:off x="685800" y="4591050"/>
-            <a:ext cx="8496300" cy="11430"/>
-          </a:xfrm>
-          <a:prstGeom xmlns:a="http://schemas.openxmlformats.org/drawingml/2006/main" prst="rect">
-            <a:avLst/>
-          </a:prstGeom>
-          <a:solidFill xmlns:a="http://schemas.openxmlformats.org/drawingml/2006/main">
-            <a:srgbClr val="D9D5CC"/>
-          </a:solidFill>
-          <a:ln xmlns:a="http://schemas.openxmlformats.org/drawingml/2006/main" w="0">
-            <a:noFill/>
-            <a:prstDash val="solid"/>
-          </a:ln>
-        </p:spPr>
-      </p:sp>
-      <p:sp>
-        <p:nvSpPr>
-          <p:cNvPr id="26" name="">
-            <a:extLst xmlns:a="http://schemas.openxmlformats.org/drawingml/2006/main">
-              <a:ext uri="{FF2B5EF4-FFF2-40B4-BE49-F238E27FC236}">
-                <a16:creationId xmlns:a16="http://schemas.microsoft.com/office/drawing/2014/main" id="{90A94389-E80E-495A-9AA4-E063C3297EAF}"/>
-              </a:ext>
-            </a:extLst>
-          </p:cNvPr>
-          <p:cNvSpPr>
-            <a:spLocks xmlns:a="http://schemas.openxmlformats.org/drawingml/2006/main" noGrp="1"/>
-          </p:cNvSpPr>
-          <p:nvPr/>
-        </p:nvSpPr>
-        <p:spPr>
-          <a:xfrm xmlns:a="http://schemas.openxmlformats.org/drawingml/2006/main">
-            <a:off x="685800" y="5010150"/>
-            <a:ext cx="628650" cy="476250"/>
-          </a:xfrm>
-          <a:prstGeom xmlns:a="http://schemas.openxmlformats.org/drawingml/2006/main" prst="rect">
-            <a:avLst/>
-          </a:prstGeom>
-          <a:noFill xmlns:a="http://schemas.openxmlformats.org/drawingml/2006/main"/>
-          <a:ln xmlns:a="http://schemas.openxmlformats.org/drawingml/2006/main" w="0">
-            <a:noFill/>
-            <a:prstDash val="solid"/>
-          </a:ln>
-        </p:spPr>
-        <p:txBody>
-          <a:bodyPr xmlns:a="http://schemas.openxmlformats.org/drawingml/2006/main" lIns="0" tIns="0" rIns="0" bIns="0" anchor="t">
-            <a:normAutofit fontScale="100000"/>
-          </a:bodyPr>
-          <a:lstStyle xmlns:a="http://schemas.openxmlformats.org/drawingml/2006/main"/>
-          <a:p xmlns:a="http://schemas.openxmlformats.org/drawingml/2006/main">
-            <a:pPr algn="l">
-              <a:lnSpc>
-                <a:spcPct val="100000"/>
-              </a:lnSpc>
-              <a:buNone/>
-              <a:defRPr sz="2625" b="1">
-                <a:solidFill>
-                  <a:srgbClr val="F6B800"/>
-                </a:solidFill>
-                <a:latin typeface="Georgia"/>
-                <a:ea typeface="Georgia"/>
-                <a:cs typeface="Georgia"/>
-              </a:defRPr>
-            </a:pPr>
-            <a:r>
-              <a:rPr sz="2625" b="1">
-                <a:solidFill>
-                  <a:srgbClr val="F6B800"/>
-                </a:solidFill>
-                <a:latin typeface="Georgia"/>
-                <a:ea typeface="Georgia"/>
-                <a:cs typeface="Georgia"/>
-              </a:rPr>
-              <a:t>03</a:t>
-            </a:r>
-          </a:p>
-        </p:txBody>
-      </p:sp>
-      <p:sp>
-        <p:nvSpPr>
-          <p:cNvPr id="27" name="">
-            <a:extLst xmlns:a="http://schemas.openxmlformats.org/drawingml/2006/main">
-              <a:ext uri="{FF2B5EF4-FFF2-40B4-BE49-F238E27FC236}">
-                <a16:creationId xmlns:a16="http://schemas.microsoft.com/office/drawing/2014/main" id="{C5345519-BCEE-4DB5-9723-B23B0CC21BC3}"/>
-              </a:ext>
-            </a:extLst>
-          </p:cNvPr>
-          <p:cNvSpPr>
-            <a:spLocks xmlns:a="http://schemas.openxmlformats.org/drawingml/2006/main" noGrp="1"/>
-          </p:cNvSpPr>
-          <p:nvPr/>
-        </p:nvSpPr>
-        <p:spPr>
-          <a:xfrm xmlns:a="http://schemas.openxmlformats.org/drawingml/2006/main">
-            <a:off x="1466850" y="4991100"/>
-            <a:ext cx="3009900" cy="381000"/>
-          </a:xfrm>
-          <a:prstGeom xmlns:a="http://schemas.openxmlformats.org/drawingml/2006/main" prst="rect">
-            <a:avLst/>
-          </a:prstGeom>
-          <a:noFill xmlns:a="http://schemas.openxmlformats.org/drawingml/2006/main"/>
-          <a:ln xmlns:a="http://schemas.openxmlformats.org/drawingml/2006/main" w="0">
-            <a:noFill/>
-            <a:prstDash val="solid"/>
-          </a:ln>
-        </p:spPr>
-        <p:txBody>
-          <a:bodyPr xmlns:a="http://schemas.openxmlformats.org/drawingml/2006/main" lIns="0" tIns="0" rIns="0" bIns="0" anchor="t">
-            <a:normAutofit fontScale="100000"/>
-          </a:bodyPr>
-          <a:lstStyle xmlns:a="http://schemas.openxmlformats.org/drawingml/2006/main"/>
-          <a:p xmlns:a="http://schemas.openxmlformats.org/drawingml/2006/main">
-            <a:pPr algn="l">
-              <a:lnSpc>
-                <a:spcPct val="100000"/>
-              </a:lnSpc>
-              <a:buNone/>
-              <a:defRPr sz="1950" b="1">
-                <a:solidFill>
-                  <a:srgbClr val="063F8C"/>
-                </a:solidFill>
-                <a:latin typeface="Georgia"/>
-                <a:ea typeface="Georgia"/>
-                <a:cs typeface="Georgia"/>
-              </a:defRPr>
-            </a:pPr>
-            <a:r>
-              <a:rPr sz="1950" b="1">
-                <a:solidFill>
-                  <a:srgbClr val="063F8C"/>
-                </a:solidFill>
-                <a:latin typeface="Georgia"/>
-                <a:ea typeface="Georgia"/>
-                <a:cs typeface="Georgia"/>
-              </a:rPr>
-              <a:t>Нигматуллин Амир</a:t>
-            </a:r>
-          </a:p>
-        </p:txBody>
-      </p:sp>
-      <p:sp>
-        <p:nvSpPr>
-          <p:cNvPr id="28" name="">
-            <a:extLst xmlns:a="http://schemas.openxmlformats.org/drawingml/2006/main">
-              <a:ext uri="{FF2B5EF4-FFF2-40B4-BE49-F238E27FC236}">
-                <a16:creationId xmlns:a16="http://schemas.microsoft.com/office/drawing/2014/main" id="{3473D998-6C97-4F69-A007-060B172B458F}"/>
-              </a:ext>
-            </a:extLst>
-          </p:cNvPr>
-          <p:cNvSpPr>
-            <a:spLocks xmlns:a="http://schemas.openxmlformats.org/drawingml/2006/main" noGrp="1"/>
-          </p:cNvSpPr>
-          <p:nvPr/>
-        </p:nvSpPr>
-        <p:spPr>
-          <a:xfrm xmlns:a="http://schemas.openxmlformats.org/drawingml/2006/main">
-            <a:off x="1476375" y="5410200"/>
-            <a:ext cx="2762250" cy="209550"/>
-          </a:xfrm>
-          <a:prstGeom xmlns:a="http://schemas.openxmlformats.org/drawingml/2006/main" prst="rect">
-            <a:avLst/>
-          </a:prstGeom>
-          <a:noFill xmlns:a="http://schemas.openxmlformats.org/drawingml/2006/main"/>
-          <a:ln xmlns:a="http://schemas.openxmlformats.org/drawingml/2006/main" w="0">
-            <a:noFill/>
-            <a:prstDash val="solid"/>
-          </a:ln>
-        </p:spPr>
-        <p:txBody>
-          <a:bodyPr xmlns:a="http://schemas.openxmlformats.org/drawingml/2006/main" lIns="0" tIns="0" rIns="0" bIns="0" anchor="t">
-            <a:normAutofit fontScale="100000"/>
-          </a:bodyPr>
-          <a:lstStyle xmlns:a="http://schemas.openxmlformats.org/drawingml/2006/main"/>
-          <a:p xmlns:a="http://schemas.openxmlformats.org/drawingml/2006/main">
-            <a:pPr algn="l">
-              <a:lnSpc>
-                <a:spcPct val="100000"/>
-              </a:lnSpc>
-              <a:buNone/>
-              <a:defRPr sz="1050" b="1">
-                <a:solidFill>
-                  <a:srgbClr val="E52B2F"/>
-                </a:solidFill>
-                <a:latin typeface="Arial"/>
-                <a:ea typeface="Arial"/>
-                <a:cs typeface="Arial"/>
-              </a:defRPr>
-            </a:pPr>
-            <a:r>
-              <a:rPr sz="1050" b="1">
-                <a:solidFill>
-                  <a:srgbClr val="E52B2F"/>
-                </a:solidFill>
-                <a:latin typeface="Arial"/>
-                <a:ea typeface="Arial"/>
-                <a:cs typeface="Arial"/>
-              </a:rPr>
-              <a:t>LLM ENGINEERING · FRONTEND</a:t>
-            </a:r>
-          </a:p>
-        </p:txBody>
-      </p:sp>
-      <p:sp>
-        <p:nvSpPr>
-          <p:cNvPr id="29" name="">
-            <a:extLst xmlns:a="http://schemas.openxmlformats.org/drawingml/2006/main">
-              <a:ext uri="{FF2B5EF4-FFF2-40B4-BE49-F238E27FC236}">
-                <a16:creationId xmlns:a16="http://schemas.microsoft.com/office/drawing/2014/main" id="{1B14A354-B224-46C6-BD9F-BACC968C282D}"/>
-              </a:ext>
-            </a:extLst>
-          </p:cNvPr>
-          <p:cNvSpPr>
-            <a:spLocks xmlns:a="http://schemas.openxmlformats.org/drawingml/2006/main" noGrp="1"/>
-          </p:cNvSpPr>
-          <p:nvPr/>
-        </p:nvSpPr>
-        <p:spPr>
-          <a:xfrm xmlns:a="http://schemas.openxmlformats.org/drawingml/2006/main">
-            <a:off x="4476750" y="5029200"/>
-            <a:ext cx="3524250" cy="533400"/>
-          </a:xfrm>
-          <a:prstGeom xmlns:a="http://schemas.openxmlformats.org/drawingml/2006/main" prst="rect">
-            <a:avLst/>
-          </a:prstGeom>
-          <a:noFill xmlns:a="http://schemas.openxmlformats.org/drawingml/2006/main"/>
-          <a:ln xmlns:a="http://schemas.openxmlformats.org/drawingml/2006/main" w="0">
-            <a:noFill/>
-            <a:prstDash val="solid"/>
-          </a:ln>
-        </p:spPr>
-        <p:txBody>
-          <a:bodyPr xmlns:a="http://schemas.openxmlformats.org/drawingml/2006/main" lIns="0" tIns="0" rIns="0" bIns="0" anchor="t">
-            <a:normAutofit fontScale="100000"/>
-          </a:bodyPr>
-          <a:lstStyle xmlns:a="http://schemas.openxmlformats.org/drawingml/2006/main"/>
-          <a:p xmlns:a="http://schemas.openxmlformats.org/drawingml/2006/main">
-            <a:pPr algn="l">
-              <a:lnSpc>
-                <a:spcPct val="108000"/>
-              </a:lnSpc>
-              <a:buNone/>
-              <a:defRPr sz="1350" b="0">
-                <a:solidFill>
-                  <a:srgbClr val="171717"/>
-                </a:solidFill>
-                <a:latin typeface="Arial"/>
-                <a:ea typeface="Arial"/>
-                <a:cs typeface="Arial"/>
-              </a:defRPr>
-            </a:pPr>
-            <a:r>
-              <a:rPr sz="1350" b="0">
-                <a:solidFill>
-                  <a:srgbClr val="171717"/>
-                </a:solidFill>
-                <a:latin typeface="Arial"/>
-                <a:ea typeface="Arial"/>
-                <a:cs typeface="Arial"/>
-              </a:rPr>
               <a:t>4 доменных агента, Groq, guardrails, заземление и UI</a:t>
-            </a:r>
-          </a:p>
-        </p:txBody>
-      </p:sp>
-      <p:sp>
-        <p:nvSpPr>
-          <p:cNvPr id="30" name="">
-            <a:extLst xmlns:a="http://schemas.openxmlformats.org/drawingml/2006/main">
-              <a:ext uri="{FF2B5EF4-FFF2-40B4-BE49-F238E27FC236}">
-                <a16:creationId xmlns:a16="http://schemas.microsoft.com/office/drawing/2014/main" id="{D24B806E-CF1A-45AA-88DF-F2CF285B3CC8}"/>
-              </a:ext>
-            </a:extLst>
-          </p:cNvPr>
-          <p:cNvSpPr>
-            <a:spLocks xmlns:a="http://schemas.openxmlformats.org/drawingml/2006/main" noGrp="1"/>
-          </p:cNvSpPr>
-          <p:nvPr/>
-        </p:nvSpPr>
-        <p:spPr>
-          <a:xfrm xmlns:a="http://schemas.openxmlformats.org/drawingml/2006/main">
-            <a:off x="8172450" y="5133975"/>
-            <a:ext cx="95250" cy="95250"/>
-          </a:xfrm>
-          <a:prstGeom xmlns:a="http://schemas.openxmlformats.org/drawingml/2006/main" prst="ellipse">
-            <a:avLst/>
-          </a:prstGeom>
-          <a:solidFill xmlns:a="http://schemas.openxmlformats.org/drawingml/2006/main">
-            <a:srgbClr val="E52B2F"/>
-          </a:solidFill>
-          <a:ln xmlns:a="http://schemas.openxmlformats.org/drawingml/2006/main" w="0">
-            <a:noFill/>
-            <a:prstDash val="solid"/>
-          </a:ln>
-        </p:spPr>
-      </p:sp>
-      <p:sp>
-        <p:nvSpPr>
-          <p:cNvPr id="31" name="">
-            <a:extLst xmlns:a="http://schemas.openxmlformats.org/drawingml/2006/main">
-              <a:ext uri="{FF2B5EF4-FFF2-40B4-BE49-F238E27FC236}">
-                <a16:creationId xmlns:a16="http://schemas.microsoft.com/office/drawing/2014/main" id="{5303B703-29CF-4FD8-9698-17F695BAA8FA}"/>
-              </a:ext>
-            </a:extLst>
-          </p:cNvPr>
-          <p:cNvSpPr>
-            <a:spLocks xmlns:a="http://schemas.openxmlformats.org/drawingml/2006/main" noGrp="1"/>
-          </p:cNvSpPr>
-          <p:nvPr/>
-        </p:nvSpPr>
-        <p:spPr>
-          <a:xfrm xmlns:a="http://schemas.openxmlformats.org/drawingml/2006/main">
-            <a:off x="8362950" y="5076825"/>
-            <a:ext cx="876300" cy="228600"/>
-          </a:xfrm>
-          <a:prstGeom xmlns:a="http://schemas.openxmlformats.org/drawingml/2006/main" prst="rect">
-            <a:avLst/>
-          </a:prstGeom>
-          <a:noFill xmlns:a="http://schemas.openxmlformats.org/drawingml/2006/main"/>
-          <a:ln xmlns:a="http://schemas.openxmlformats.org/drawingml/2006/main" w="0">
-            <a:noFill/>
-            <a:prstDash val="solid"/>
-          </a:ln>
-        </p:spPr>
-        <p:txBody>
-          <a:bodyPr xmlns:a="http://schemas.openxmlformats.org/drawingml/2006/main" lIns="0" tIns="0" rIns="0" bIns="0" anchor="t">
-            <a:normAutofit fontScale="100000"/>
-          </a:bodyPr>
-          <a:lstStyle xmlns:a="http://schemas.openxmlformats.org/drawingml/2006/main"/>
-          <a:p xmlns:a="http://schemas.openxmlformats.org/drawingml/2006/main">
-            <a:pPr algn="l">
-              <a:lnSpc>
-                <a:spcPct val="100000"/>
-              </a:lnSpc>
-              <a:buNone/>
-              <a:defRPr sz="1125" b="1">
-                <a:solidFill>
-                  <a:srgbClr val="171717"/>
-                </a:solidFill>
-                <a:latin typeface="Arial"/>
-                <a:ea typeface="Arial"/>
-                <a:cs typeface="Arial"/>
-              </a:defRPr>
-            </a:pPr>
-            <a:r>
-              <a:rPr sz="1125" b="1">
-                <a:solidFill>
-                  <a:srgbClr val="171717"/>
-                </a:solidFill>
-                <a:latin typeface="Arial"/>
-                <a:ea typeface="Arial"/>
-                <a:cs typeface="Arial"/>
-              </a:rPr>
-              <a:t>активное</a:t>
             </a:r>
           </a:p>
         </p:txBody>
@@ -4076,6 +3793,7 @@
           <a:lstStyle xmlns:a="http://schemas.openxmlformats.org/drawingml/2006/main"/>
           <a:p xmlns:a="http://schemas.openxmlformats.org/drawingml/2006/main">
             <a:pPr algn="ctr">
+              <a:buNone/>
               <a:defRPr sz="975" b="1">
                 <a:solidFill>
                   <a:srgbClr val="171717"/>
@@ -4160,7 +3878,7 @@
         </p:spPr>
         <p:txBody>
           <a:bodyPr xmlns:a="http://schemas.openxmlformats.org/drawingml/2006/main" lIns="0" tIns="0" rIns="0" bIns="0" anchor="t">
-            <a:normAutofit fontScale="97931"/>
+            <a:normAutofit fontScale="100000"/>
           </a:bodyPr>
           <a:lstStyle xmlns:a="http://schemas.openxmlformats.org/drawingml/2006/main"/>
           <a:p xmlns:a="http://schemas.openxmlformats.org/drawingml/2006/main">
@@ -4180,14 +3898,11 @@
             </a:pPr>
             <a:r>
               <a:rPr sz="3450" b="1">
-                <a:solidFill>
-                  <a:srgbClr val="063F8C"/>
-                </a:solidFill>
                 <a:latin typeface="Georgia"/>
                 <a:ea typeface="Georgia"/>
                 <a:cs typeface="Georgia"/>
               </a:rPr>
-              <a:t>Зелёный сигнал не показывает всю картину</a:t>
+              <a:t>Развёрнутый отчёт создаёт перегрузку</a:t>
             </a:r>
           </a:p>
         </p:txBody>
@@ -4242,14 +3957,11 @@
             </a:pPr>
             <a:r>
               <a:rPr sz="1425" b="0">
-                <a:solidFill>
-                  <a:srgbClr val="5F6470"/>
-                </a:solidFill>
-                <a:latin typeface="Arial"/>
-                <a:ea typeface="Arial"/>
-                <a:cs typeface="Arial"/>
-              </a:rPr>
-              <a:t>Предприниматель видит итоговый цвет — критичные факты остаются внутри отчёта.</a:t>
+                <a:latin typeface="Arial"/>
+                <a:ea typeface="Arial"/>
+                <a:cs typeface="Arial"/>
+              </a:rPr>
+              <a:t>Десятки оценок и пояснений трудно сопоставить — главное теряется в деталях.</a:t>
             </a:r>
           </a:p>
         </p:txBody>
@@ -4304,14 +4016,11 @@
             </a:pPr>
             <a:r>
               <a:rPr sz="5400" b="1">
-                <a:solidFill>
-                  <a:srgbClr val="E52B2F"/>
-                </a:solidFill>
                 <a:latin typeface="Georgia"/>
                 <a:ea typeface="Georgia"/>
                 <a:cs typeface="Georgia"/>
               </a:rPr>
-              <a:t>9 / 9</a:t>
+              <a:t>МНОГО</a:t>
             </a:r>
           </a:p>
         </p:txBody>
@@ -4366,41 +4075,35 @@
             </a:pPr>
             <a:r>
               <a:rPr sz="1500" b="1">
+                <a:latin typeface="Arial"/>
+                <a:ea typeface="Arial"/>
+                <a:cs typeface="Arial"/>
+              </a:rPr>
+              <a:t>оценок, разделов</a:t>
+            </a:r>
+          </a:p>
+          <a:p xmlns:a="http://schemas.openxmlformats.org/drawingml/2006/main">
+            <a:pPr algn="l">
+              <a:lnSpc>
+                <a:spcPct val="105000"/>
+              </a:lnSpc>
+              <a:buNone/>
+              <a:defRPr sz="1500" b="1">
                 <a:solidFill>
                   <a:srgbClr val="171717"/>
                 </a:solidFill>
                 <a:latin typeface="Arial"/>
                 <a:ea typeface="Arial"/>
                 <a:cs typeface="Arial"/>
-              </a:rPr>
-              <a:t>с блокировкой счетов ФНС</a:t>
-            </a:r>
-          </a:p>
-          <a:p xmlns:a="http://schemas.openxmlformats.org/drawingml/2006/main">
-            <a:pPr algn="l">
-              <a:lnSpc>
-                <a:spcPct val="105000"/>
-              </a:lnSpc>
-              <a:buNone/>
-              <a:defRPr sz="1500" b="1">
-                <a:solidFill>
-                  <a:srgbClr val="171717"/>
-                </a:solidFill>
-                <a:latin typeface="Arial"/>
-                <a:ea typeface="Arial"/>
-                <a:cs typeface="Arial"/>
               </a:defRPr>
             </a:pPr>
             <a:r>
               <a:rPr sz="1500" b="1">
-                <a:solidFill>
-                  <a:srgbClr val="171717"/>
-                </a:solidFill>
-                <a:latin typeface="Arial"/>
-                <a:ea typeface="Arial"/>
-                <a:cs typeface="Arial"/>
-              </a:rPr>
-              <a:t>помечены GREEN</a:t>
+                <a:latin typeface="Arial"/>
+                <a:ea typeface="Arial"/>
+                <a:cs typeface="Arial"/>
+              </a:rPr>
+              <a:t>и пояснений</a:t>
             </a:r>
           </a:p>
         </p:txBody>
@@ -4486,14 +4189,11 @@
             </a:pPr>
             <a:r>
               <a:rPr sz="4950" b="1">
-                <a:solidFill>
-                  <a:srgbClr val="063F8C"/>
-                </a:solidFill>
                 <a:latin typeface="Georgia"/>
                 <a:ea typeface="Georgia"/>
                 <a:cs typeface="Georgia"/>
               </a:rPr>
-              <a:t>46 / 100</a:t>
+              <a:t>ДОЛГО</a:t>
             </a:r>
           </a:p>
         </p:txBody>
@@ -4548,41 +4248,35 @@
             </a:pPr>
             <a:r>
               <a:rPr sz="1500" b="1">
+                <a:latin typeface="Arial"/>
+                <a:ea typeface="Arial"/>
+                <a:cs typeface="Arial"/>
+              </a:rPr>
+              <a:t>читать и сопоставлять</a:t>
+            </a:r>
+          </a:p>
+          <a:p xmlns:a="http://schemas.openxmlformats.org/drawingml/2006/main">
+            <a:pPr algn="l">
+              <a:lnSpc>
+                <a:spcPct val="105000"/>
+              </a:lnSpc>
+              <a:buNone/>
+              <a:defRPr sz="1500" b="1">
                 <a:solidFill>
                   <a:srgbClr val="171717"/>
                 </a:solidFill>
                 <a:latin typeface="Arial"/>
                 <a:ea typeface="Arial"/>
                 <a:cs typeface="Arial"/>
-              </a:rPr>
-              <a:t>готовый текст расходится</a:t>
-            </a:r>
-          </a:p>
-          <a:p xmlns:a="http://schemas.openxmlformats.org/drawingml/2006/main">
-            <a:pPr algn="l">
-              <a:lnSpc>
-                <a:spcPct val="105000"/>
-              </a:lnSpc>
-              <a:buNone/>
-              <a:defRPr sz="1500" b="1">
-                <a:solidFill>
-                  <a:srgbClr val="171717"/>
-                </a:solidFill>
-                <a:latin typeface="Arial"/>
-                <a:ea typeface="Arial"/>
-                <a:cs typeface="Arial"/>
               </a:defRPr>
             </a:pPr>
             <a:r>
               <a:rPr sz="1500" b="1">
-                <a:solidFill>
-                  <a:srgbClr val="171717"/>
-                </a:solidFill>
-                <a:latin typeface="Arial"/>
-                <a:ea typeface="Arial"/>
-                <a:cs typeface="Arial"/>
-              </a:rPr>
-              <a:t>с числом кодов ОКВЭД</a:t>
+                <a:latin typeface="Arial"/>
+                <a:ea typeface="Arial"/>
+                <a:cs typeface="Arial"/>
+              </a:rPr>
+              <a:t>вручную</a:t>
             </a:r>
           </a:p>
         </p:txBody>
@@ -4667,15 +4361,12 @@
               </a:defRPr>
             </a:pPr>
             <a:r>
-              <a:rPr sz="4950" b="1">
-                <a:solidFill>
-                  <a:srgbClr val="063F8C"/>
-                </a:solidFill>
+              <a:rPr sz="4500" b="1">
                 <a:latin typeface="Georgia"/>
                 <a:ea typeface="Georgia"/>
                 <a:cs typeface="Georgia"/>
               </a:rPr>
-              <a:t>33 / 100</a:t>
+              <a:t>СЛОЖНО</a:t>
             </a:r>
           </a:p>
         </p:txBody>
@@ -4730,41 +4421,35 @@
             </a:pPr>
             <a:r>
               <a:rPr sz="1500" b="1">
+                <a:latin typeface="Arial"/>
+                <a:ea typeface="Arial"/>
+                <a:cs typeface="Arial"/>
+              </a:rPr>
+              <a:t>выделить главное</a:t>
+            </a:r>
+          </a:p>
+          <a:p xmlns:a="http://schemas.openxmlformats.org/drawingml/2006/main">
+            <a:pPr algn="l">
+              <a:lnSpc>
+                <a:spcPct val="105000"/>
+              </a:lnSpc>
+              <a:buNone/>
+              <a:defRPr sz="1500" b="1">
                 <a:solidFill>
                   <a:srgbClr val="171717"/>
                 </a:solidFill>
                 <a:latin typeface="Arial"/>
                 <a:ea typeface="Arial"/>
                 <a:cs typeface="Arial"/>
-              </a:rPr>
-              <a:t>карточек без финансовой</a:t>
-            </a:r>
-          </a:p>
-          <a:p xmlns:a="http://schemas.openxmlformats.org/drawingml/2006/main">
-            <a:pPr algn="l">
-              <a:lnSpc>
-                <a:spcPct val="105000"/>
-              </a:lnSpc>
-              <a:buNone/>
-              <a:defRPr sz="1500" b="1">
-                <a:solidFill>
-                  <a:srgbClr val="171717"/>
-                </a:solidFill>
-                <a:latin typeface="Arial"/>
-                <a:ea typeface="Arial"/>
-                <a:cs typeface="Arial"/>
               </a:defRPr>
             </a:pPr>
             <a:r>
               <a:rPr sz="1500" b="1">
-                <a:solidFill>
-                  <a:srgbClr val="171717"/>
-                </a:solidFill>
-                <a:latin typeface="Arial"/>
-                <a:ea typeface="Arial"/>
-                <a:cs typeface="Arial"/>
-              </a:rPr>
-              <a:t>отчётности</a:t>
+                <a:latin typeface="Arial"/>
+                <a:ea typeface="Arial"/>
+                <a:cs typeface="Arial"/>
+              </a:rPr>
+              <a:t>и принять решение</a:t>
             </a:r>
           </a:p>
         </p:txBody>
@@ -4881,14 +4566,11 @@
             </a:pPr>
             <a:r>
               <a:rPr sz="2250" b="1">
-                <a:solidFill>
-                  <a:srgbClr val="FFFFFF"/>
-                </a:solidFill>
                 <a:latin typeface="Georgia"/>
                 <a:ea typeface="Georgia"/>
                 <a:cs typeface="Georgia"/>
               </a:rPr>
-              <a:t>Цель — дать короткий проверяемый ответ по ИНН</a:t>
+              <a:t>Агенты суммаризируют отчёт и выделяют главное</a:t>
             </a:r>
           </a:p>
         </p:txBody>
@@ -4943,14 +4625,11 @@
             </a:pPr>
             <a:r>
               <a:rPr sz="1275" b="1">
-                <a:solidFill>
-                  <a:srgbClr val="F6B800"/>
-                </a:solidFill>
-                <a:latin typeface="Arial"/>
-                <a:ea typeface="Arial"/>
-                <a:cs typeface="Arial"/>
-              </a:rPr>
-              <a:t>без нового скоринга · только факты отчёта и честная неполнота данных</a:t>
+                <a:latin typeface="Arial"/>
+                <a:ea typeface="Arial"/>
+                <a:cs typeface="Arial"/>
+              </a:rPr>
+              <a:t>короткий вывод · ключевые риски · доказательства по запросу</a:t>
             </a:r>
           </a:p>
         </p:txBody>
@@ -5145,6 +4824,7 @@
           <a:lstStyle xmlns:a="http://schemas.openxmlformats.org/drawingml/2006/main"/>
           <a:p xmlns:a="http://schemas.openxmlformats.org/drawingml/2006/main">
             <a:pPr algn="ctr">
+              <a:buNone/>
               <a:defRPr sz="975" b="1">
                 <a:solidFill>
                   <a:srgbClr val="171717"/>
@@ -5215,8 +4895,8 @@
         </p:nvSpPr>
         <p:spPr>
           <a:xfrm xmlns:a="http://schemas.openxmlformats.org/drawingml/2006/main">
-            <a:off x="666750" y="1028700"/>
-            <a:ext cx="10287000" cy="571500"/>
+            <a:off x="666750" y="952500"/>
+            <a:ext cx="10287000" cy="838200"/>
           </a:xfrm>
           <a:prstGeom xmlns:a="http://schemas.openxmlformats.org/drawingml/2006/main" prst="rect">
             <a:avLst/>
@@ -5229,13 +4909,13 @@
         </p:spPr>
         <p:txBody>
           <a:bodyPr xmlns:a="http://schemas.openxmlformats.org/drawingml/2006/main" lIns="0" tIns="0" rIns="0" bIns="0" anchor="t">
-            <a:normAutofit fontScale="94041"/>
+            <a:normAutofit fontScale="100000"/>
           </a:bodyPr>
           <a:lstStyle xmlns:a="http://schemas.openxmlformats.org/drawingml/2006/main"/>
           <a:p xmlns:a="http://schemas.openxmlformats.org/drawingml/2006/main">
             <a:pPr algn="l">
               <a:lnSpc>
-                <a:spcPct val="100000"/>
+                <a:spcPct val="96000"/>
               </a:lnSpc>
               <a:buNone/>
               <a:defRPr sz="3375" b="1">
@@ -5248,15 +4928,36 @@
               </a:defRPr>
             </a:pPr>
             <a:r>
-              <a:rPr sz="3375" b="1">
-                <a:solidFill>
-                  <a:srgbClr val="063F8C"/>
-                </a:solidFill>
+              <a:rPr sz="2400" b="1">
                 <a:latin typeface="Georgia"/>
                 <a:ea typeface="Georgia"/>
                 <a:cs typeface="Georgia"/>
               </a:rPr>
-              <a:t>Гипотеза: решение принимается за один экран</a:t>
+              <a:t>Гипотеза: суммаризация отчёта ускорит</a:t>
+            </a:r>
+          </a:p>
+          <a:p xmlns:a="http://schemas.openxmlformats.org/drawingml/2006/main">
+            <a:pPr algn="l">
+              <a:lnSpc>
+                <a:spcPct val="96000"/>
+              </a:lnSpc>
+              <a:buNone/>
+              <a:defRPr sz="3375" b="1">
+                <a:solidFill>
+                  <a:srgbClr val="063F8C"/>
+                </a:solidFill>
+                <a:latin typeface="Georgia"/>
+                <a:ea typeface="Georgia"/>
+                <a:cs typeface="Georgia"/>
+              </a:defRPr>
+            </a:pPr>
+            <a:r>
+              <a:rPr sz="2400" b="1">
+                <a:latin typeface="Georgia"/>
+                <a:ea typeface="Georgia"/>
+                <a:cs typeface="Georgia"/>
+              </a:rPr>
+              <a:t>и упростит процесс принятия решения пользователем</a:t>
             </a:r>
           </a:p>
         </p:txBody>
@@ -5311,14 +5012,11 @@
             </a:pPr>
             <a:r>
               <a:rPr sz="1050" b="1">
-                <a:solidFill>
-                  <a:srgbClr val="E52B2F"/>
-                </a:solidFill>
-                <a:latin typeface="Arial"/>
-                <a:ea typeface="Arial"/>
-                <a:cs typeface="Arial"/>
-              </a:rPr>
-              <a:t>СЕЙЧАС</a:t>
+                <a:latin typeface="Arial"/>
+                <a:ea typeface="Arial"/>
+                <a:cs typeface="Arial"/>
+              </a:rPr>
+              <a:t>ИСХОДНЫЙ ОТЧЁТ</a:t>
             </a:r>
           </a:p>
         </p:txBody>
@@ -5373,14 +5071,11 @@
             </a:pPr>
             <a:r>
               <a:rPr sz="1875" b="1">
-                <a:solidFill>
-                  <a:srgbClr val="171717"/>
-                </a:solidFill>
-                <a:latin typeface="Arial"/>
-                <a:ea typeface="Arial"/>
-                <a:cs typeface="Arial"/>
-              </a:rPr>
-              <a:t>PDF → цвет → ручная перепроверка</a:t>
+                <a:latin typeface="Arial"/>
+                <a:ea typeface="Arial"/>
+                <a:cs typeface="Arial"/>
+              </a:rPr>
+              <a:t>Много данных → высокая нагрузка</a:t>
             </a:r>
           </a:p>
         </p:txBody>
@@ -5468,14 +5163,11 @@
             </a:pPr>
             <a:r>
               <a:rPr sz="1050" b="1">
-                <a:solidFill>
-                  <a:srgbClr val="063F8C"/>
-                </a:solidFill>
-                <a:latin typeface="Arial"/>
-                <a:ea typeface="Arial"/>
-                <a:cs typeface="Arial"/>
-              </a:rPr>
-              <a:t>С АГЕНТОМ</a:t>
+                <a:latin typeface="Arial"/>
+                <a:ea typeface="Arial"/>
+                <a:cs typeface="Arial"/>
+              </a:rPr>
+              <a:t>АГЕНТНОЕ САММАРИ</a:t>
             </a:r>
           </a:p>
         </p:txBody>
@@ -5530,14 +5222,11 @@
             </a:pPr>
             <a:r>
               <a:rPr sz="1875" b="1">
-                <a:solidFill>
-                  <a:srgbClr val="063F8C"/>
-                </a:solidFill>
-                <a:latin typeface="Arial"/>
-                <a:ea typeface="Arial"/>
-                <a:cs typeface="Arial"/>
-              </a:rPr>
-              <a:t>ИНН → ответ + факты → действие</a:t>
+                <a:latin typeface="Arial"/>
+                <a:ea typeface="Arial"/>
+                <a:cs typeface="Arial"/>
+              </a:rPr>
+              <a:t>Главное → доказательства → выбор</a:t>
             </a:r>
           </a:p>
         </p:txBody>
@@ -5685,14 +5374,35 @@
             </a:pPr>
             <a:r>
               <a:rPr sz="1650" b="1">
-                <a:solidFill>
-                  <a:srgbClr val="063F8C"/>
-                </a:solidFill>
                 <a:latin typeface="Georgia"/>
                 <a:ea typeface="Georgia"/>
                 <a:cs typeface="Georgia"/>
               </a:rPr>
-              <a:t>Одна фраза</a:t>
+              <a:t>Итоговый</a:t>
+            </a:r>
+          </a:p>
+          <a:p xmlns:a="http://schemas.openxmlformats.org/drawingml/2006/main">
+            <a:pPr algn="l">
+              <a:lnSpc>
+                <a:spcPct val="102000"/>
+              </a:lnSpc>
+              <a:buNone/>
+              <a:defRPr sz="1650" b="1">
+                <a:solidFill>
+                  <a:srgbClr val="063F8C"/>
+                </a:solidFill>
+                <a:latin typeface="Georgia"/>
+                <a:ea typeface="Georgia"/>
+                <a:cs typeface="Georgia"/>
+              </a:defRPr>
+            </a:pPr>
+            <a:r>
+              <a:rPr sz="1650" b="1">
+                <a:latin typeface="Georgia"/>
+                <a:ea typeface="Georgia"/>
+                <a:cs typeface="Georgia"/>
+              </a:rPr>
+              <a:t>вывод</a:t>
             </a:r>
           </a:p>
         </p:txBody>
@@ -5747,41 +5457,35 @@
             </a:pPr>
             <a:r>
               <a:rPr sz="1350" b="0">
+                <a:latin typeface="Arial"/>
+                <a:ea typeface="Arial"/>
+                <a:cs typeface="Arial"/>
+              </a:rPr>
+              <a:t>Наглядный ответ агента</a:t>
+            </a:r>
+          </a:p>
+          <a:p xmlns:a="http://schemas.openxmlformats.org/drawingml/2006/main">
+            <a:pPr algn="l">
+              <a:lnSpc>
+                <a:spcPct val="110000"/>
+              </a:lnSpc>
+              <a:buNone/>
+              <a:defRPr sz="1350" b="0">
                 <a:solidFill>
                   <a:srgbClr val="171717"/>
                 </a:solidFill>
                 <a:latin typeface="Arial"/>
                 <a:ea typeface="Arial"/>
                 <a:cs typeface="Arial"/>
-              </a:rPr>
-              <a:t>Короткий вывод</a:t>
-            </a:r>
-          </a:p>
-          <a:p xmlns:a="http://schemas.openxmlformats.org/drawingml/2006/main">
-            <a:pPr algn="l">
-              <a:lnSpc>
-                <a:spcPct val="110000"/>
-              </a:lnSpc>
-              <a:buNone/>
-              <a:defRPr sz="1350" b="0">
-                <a:solidFill>
-                  <a:srgbClr val="171717"/>
-                </a:solidFill>
-                <a:latin typeface="Arial"/>
-                <a:ea typeface="Arial"/>
-                <a:cs typeface="Arial"/>
               </a:defRPr>
             </a:pPr>
             <a:r>
               <a:rPr sz="1350" b="0">
-                <a:solidFill>
-                  <a:srgbClr val="171717"/>
-                </a:solidFill>
-                <a:latin typeface="Arial"/>
-                <a:ea typeface="Arial"/>
-                <a:cs typeface="Arial"/>
-              </a:rPr>
-              <a:t>на языке предпринимателя.</a:t>
+                <a:latin typeface="Arial"/>
+                <a:ea typeface="Arial"/>
+                <a:cs typeface="Arial"/>
+              </a:rPr>
+              <a:t>на первом экране.</a:t>
             </a:r>
           </a:p>
         </p:txBody>
@@ -5929,14 +5633,11 @@
             </a:pPr>
             <a:r>
               <a:rPr sz="1650" b="1">
-                <a:solidFill>
-                  <a:srgbClr val="063F8C"/>
-                </a:solidFill>
                 <a:latin typeface="Georgia"/>
                 <a:ea typeface="Georgia"/>
                 <a:cs typeface="Georgia"/>
               </a:rPr>
-              <a:t>Оценка банка неизменна</a:t>
+              <a:t>Банк + LLM</a:t>
             </a:r>
           </a:p>
         </p:txBody>
@@ -5959,6 +5660,120 @@
           <a:xfrm xmlns:a="http://schemas.openxmlformats.org/drawingml/2006/main">
             <a:off x="3409950" y="4724400"/>
             <a:ext cx="2333625" cy="647700"/>
+          </a:xfrm>
+          <a:prstGeom xmlns:a="http://schemas.openxmlformats.org/drawingml/2006/main" prst="rect">
+            <a:avLst/>
+          </a:prstGeom>
+          <a:noFill xmlns:a="http://schemas.openxmlformats.org/drawingml/2006/main"/>
+          <a:ln xmlns:a="http://schemas.openxmlformats.org/drawingml/2006/main" w="0">
+            <a:noFill/>
+            <a:prstDash val="solid"/>
+          </a:ln>
+        </p:spPr>
+        <p:txBody>
+          <a:bodyPr xmlns:a="http://schemas.openxmlformats.org/drawingml/2006/main" lIns="0" tIns="0" rIns="0" bIns="0" anchor="t">
+            <a:normAutofit fontScale="95398"/>
+          </a:bodyPr>
+          <a:lstStyle xmlns:a="http://schemas.openxmlformats.org/drawingml/2006/main"/>
+          <a:p xmlns:a="http://schemas.openxmlformats.org/drawingml/2006/main">
+            <a:pPr algn="l">
+              <a:lnSpc>
+                <a:spcPct val="110000"/>
+              </a:lnSpc>
+              <a:buNone/>
+              <a:defRPr sz="1350" b="0">
+                <a:solidFill>
+                  <a:srgbClr val="171717"/>
+                </a:solidFill>
+                <a:latin typeface="Arial"/>
+                <a:ea typeface="Arial"/>
+                <a:cs typeface="Arial"/>
+              </a:defRPr>
+            </a:pPr>
+            <a:r>
+              <a:rPr sz="1350" b="0">
+                <a:latin typeface="Arial"/>
+                <a:ea typeface="Arial"/>
+                <a:cs typeface="Arial"/>
+              </a:rPr>
+              <a:t>Строгие оценки банка</a:t>
+            </a:r>
+          </a:p>
+          <a:p xmlns:a="http://schemas.openxmlformats.org/drawingml/2006/main">
+            <a:pPr algn="l">
+              <a:lnSpc>
+                <a:spcPct val="110000"/>
+              </a:lnSpc>
+              <a:buNone/>
+              <a:defRPr sz="1350" b="0">
+                <a:solidFill>
+                  <a:srgbClr val="171717"/>
+                </a:solidFill>
+                <a:latin typeface="Arial"/>
+                <a:ea typeface="Arial"/>
+                <a:cs typeface="Arial"/>
+              </a:defRPr>
+            </a:pPr>
+            <a:r>
+              <a:rPr sz="1350" b="0">
+                <a:latin typeface="Arial"/>
+                <a:ea typeface="Arial"/>
+                <a:cs typeface="Arial"/>
+              </a:rPr>
+              <a:t>+ дополнительные факторы LLM.</a:t>
+            </a:r>
+          </a:p>
+        </p:txBody>
+      </p:sp>
+      <p:sp>
+        <p:nvSpPr>
+          <p:cNvPr id="20" name="">
+            <a:extLst xmlns:a="http://schemas.openxmlformats.org/drawingml/2006/main">
+              <a:ext uri="{FF2B5EF4-FFF2-40B4-BE49-F238E27FC236}">
+                <a16:creationId xmlns:a16="http://schemas.microsoft.com/office/drawing/2014/main" id="{071192CC-267E-426E-A212-86687344728C}"/>
+              </a:ext>
+            </a:extLst>
+          </p:cNvPr>
+          <p:cNvSpPr>
+            <a:spLocks xmlns:a="http://schemas.openxmlformats.org/drawingml/2006/main" noGrp="1"/>
+          </p:cNvSpPr>
+          <p:nvPr/>
+        </p:nvSpPr>
+        <p:spPr>
+          <a:xfrm xmlns:a="http://schemas.openxmlformats.org/drawingml/2006/main">
+            <a:off x="5924550" y="3476625"/>
+            <a:ext cx="19050" cy="1962150"/>
+          </a:xfrm>
+          <a:prstGeom xmlns:a="http://schemas.openxmlformats.org/drawingml/2006/main" prst="rect">
+            <a:avLst/>
+          </a:prstGeom>
+          <a:solidFill xmlns:a="http://schemas.openxmlformats.org/drawingml/2006/main">
+            <a:srgbClr val="D9D5CC"/>
+          </a:solidFill>
+          <a:ln xmlns:a="http://schemas.openxmlformats.org/drawingml/2006/main" w="0">
+            <a:noFill/>
+            <a:prstDash val="solid"/>
+          </a:ln>
+        </p:spPr>
+      </p:sp>
+      <p:sp>
+        <p:nvSpPr>
+          <p:cNvPr id="21" name="">
+            <a:extLst xmlns:a="http://schemas.openxmlformats.org/drawingml/2006/main">
+              <a:ext uri="{FF2B5EF4-FFF2-40B4-BE49-F238E27FC236}">
+                <a16:creationId xmlns:a16="http://schemas.microsoft.com/office/drawing/2014/main" id="{272F5804-FC75-431B-B564-B497A6C62B96}"/>
+              </a:ext>
+            </a:extLst>
+          </p:cNvPr>
+          <p:cNvSpPr>
+            <a:spLocks xmlns:a="http://schemas.openxmlformats.org/drawingml/2006/main" noGrp="1"/>
+          </p:cNvSpPr>
+          <p:nvPr/>
+        </p:nvSpPr>
+        <p:spPr>
+          <a:xfrm xmlns:a="http://schemas.openxmlformats.org/drawingml/2006/main">
+            <a:off x="6134100" y="3390900"/>
+            <a:ext cx="857250" cy="514350"/>
           </a:xfrm>
           <a:prstGeom xmlns:a="http://schemas.openxmlformats.org/drawingml/2006/main" prst="rect">
             <a:avLst/>
@@ -5977,6 +5792,151 @@
           <a:p xmlns:a="http://schemas.openxmlformats.org/drawingml/2006/main">
             <a:pPr algn="l">
               <a:lnSpc>
+                <a:spcPct val="100000"/>
+              </a:lnSpc>
+              <a:buNone/>
+              <a:defRPr sz="2850" b="1">
+                <a:solidFill>
+                  <a:srgbClr val="F6B800"/>
+                </a:solidFill>
+                <a:latin typeface="Georgia"/>
+                <a:ea typeface="Georgia"/>
+                <a:cs typeface="Georgia"/>
+              </a:defRPr>
+            </a:pPr>
+            <a:r>
+              <a:rPr sz="2850" b="1">
+                <a:solidFill>
+                  <a:srgbClr val="F6B800"/>
+                </a:solidFill>
+                <a:latin typeface="Georgia"/>
+                <a:ea typeface="Georgia"/>
+                <a:cs typeface="Georgia"/>
+              </a:rPr>
+              <a:t>03</a:t>
+            </a:r>
+          </a:p>
+        </p:txBody>
+      </p:sp>
+      <p:sp>
+        <p:nvSpPr>
+          <p:cNvPr id="22" name="">
+            <a:extLst xmlns:a="http://schemas.openxmlformats.org/drawingml/2006/main">
+              <a:ext uri="{FF2B5EF4-FFF2-40B4-BE49-F238E27FC236}">
+                <a16:creationId xmlns:a16="http://schemas.microsoft.com/office/drawing/2014/main" id="{13173D55-F4CF-4F03-8B37-C0E239164562}"/>
+              </a:ext>
+            </a:extLst>
+          </p:cNvPr>
+          <p:cNvSpPr>
+            <a:spLocks xmlns:a="http://schemas.openxmlformats.org/drawingml/2006/main" noGrp="1"/>
+          </p:cNvSpPr>
+          <p:nvPr/>
+        </p:nvSpPr>
+        <p:spPr>
+          <a:xfrm xmlns:a="http://schemas.openxmlformats.org/drawingml/2006/main">
+            <a:off x="6134100" y="4057650"/>
+            <a:ext cx="2362200" cy="533400"/>
+          </a:xfrm>
+          <a:prstGeom xmlns:a="http://schemas.openxmlformats.org/drawingml/2006/main" prst="rect">
+            <a:avLst/>
+          </a:prstGeom>
+          <a:noFill xmlns:a="http://schemas.openxmlformats.org/drawingml/2006/main"/>
+          <a:ln xmlns:a="http://schemas.openxmlformats.org/drawingml/2006/main" w="0">
+            <a:noFill/>
+            <a:prstDash val="solid"/>
+          </a:ln>
+        </p:spPr>
+        <p:txBody>
+          <a:bodyPr xmlns:a="http://schemas.openxmlformats.org/drawingml/2006/main" lIns="0" tIns="0" rIns="0" bIns="0" anchor="t">
+            <a:normAutofit fontScale="100000"/>
+          </a:bodyPr>
+          <a:lstStyle xmlns:a="http://schemas.openxmlformats.org/drawingml/2006/main"/>
+          <a:p xmlns:a="http://schemas.openxmlformats.org/drawingml/2006/main">
+            <a:pPr algn="l">
+              <a:lnSpc>
+                <a:spcPct val="102000"/>
+              </a:lnSpc>
+              <a:buNone/>
+              <a:defRPr sz="1650" b="1">
+                <a:solidFill>
+                  <a:srgbClr val="063F8C"/>
+                </a:solidFill>
+                <a:latin typeface="Georgia"/>
+                <a:ea typeface="Georgia"/>
+                <a:cs typeface="Georgia"/>
+              </a:defRPr>
+            </a:pPr>
+            <a:r>
+              <a:rPr sz="1650" b="1">
+                <a:latin typeface="Georgia"/>
+                <a:ea typeface="Georgia"/>
+                <a:cs typeface="Georgia"/>
+              </a:rPr>
+              <a:t>Риски по</a:t>
+            </a:r>
+          </a:p>
+          <a:p xmlns:a="http://schemas.openxmlformats.org/drawingml/2006/main">
+            <a:pPr algn="l">
+              <a:lnSpc>
+                <a:spcPct val="102000"/>
+              </a:lnSpc>
+              <a:buNone/>
+              <a:defRPr sz="1650" b="1">
+                <a:solidFill>
+                  <a:srgbClr val="063F8C"/>
+                </a:solidFill>
+                <a:latin typeface="Georgia"/>
+                <a:ea typeface="Georgia"/>
+                <a:cs typeface="Georgia"/>
+              </a:defRPr>
+            </a:pPr>
+            <a:r>
+              <a:rPr sz="1650" b="1">
+                <a:latin typeface="Georgia"/>
+                <a:ea typeface="Georgia"/>
+                <a:cs typeface="Georgia"/>
+              </a:rPr>
+              <a:t>доменам</a:t>
+            </a:r>
+          </a:p>
+        </p:txBody>
+      </p:sp>
+      <p:sp>
+        <p:nvSpPr>
+          <p:cNvPr id="23" name="">
+            <a:extLst xmlns:a="http://schemas.openxmlformats.org/drawingml/2006/main">
+              <a:ext uri="{FF2B5EF4-FFF2-40B4-BE49-F238E27FC236}">
+                <a16:creationId xmlns:a16="http://schemas.microsoft.com/office/drawing/2014/main" id="{0EC10A8C-F79B-4BA6-863E-D5403AD209B5}"/>
+              </a:ext>
+            </a:extLst>
+          </p:cNvPr>
+          <p:cNvSpPr>
+            <a:spLocks xmlns:a="http://schemas.openxmlformats.org/drawingml/2006/main" noGrp="1"/>
+          </p:cNvSpPr>
+          <p:nvPr/>
+        </p:nvSpPr>
+        <p:spPr>
+          <a:xfrm xmlns:a="http://schemas.openxmlformats.org/drawingml/2006/main">
+            <a:off x="6134100" y="4724400"/>
+            <a:ext cx="2333625" cy="647700"/>
+          </a:xfrm>
+          <a:prstGeom xmlns:a="http://schemas.openxmlformats.org/drawingml/2006/main" prst="rect">
+            <a:avLst/>
+          </a:prstGeom>
+          <a:noFill xmlns:a="http://schemas.openxmlformats.org/drawingml/2006/main"/>
+          <a:ln xmlns:a="http://schemas.openxmlformats.org/drawingml/2006/main" w="0">
+            <a:noFill/>
+            <a:prstDash val="solid"/>
+          </a:ln>
+        </p:spPr>
+        <p:txBody>
+          <a:bodyPr xmlns:a="http://schemas.openxmlformats.org/drawingml/2006/main" lIns="0" tIns="0" rIns="0" bIns="0" anchor="t">
+            <a:normAutofit fontScale="100000"/>
+          </a:bodyPr>
+          <a:lstStyle xmlns:a="http://schemas.openxmlformats.org/drawingml/2006/main"/>
+          <a:p xmlns:a="http://schemas.openxmlformats.org/drawingml/2006/main">
+            <a:pPr algn="l">
+              <a:lnSpc>
                 <a:spcPct val="110000"/>
               </a:lnSpc>
               <a:buNone/>
@@ -5991,62 +5951,56 @@
             </a:pPr>
             <a:r>
               <a:rPr sz="1350" b="0">
+                <a:latin typeface="Arial"/>
+                <a:ea typeface="Arial"/>
+                <a:cs typeface="Arial"/>
+              </a:rPr>
+              <a:t>Каждый риск —</a:t>
+            </a:r>
+          </a:p>
+          <a:p xmlns:a="http://schemas.openxmlformats.org/drawingml/2006/main">
+            <a:pPr algn="l">
+              <a:lnSpc>
+                <a:spcPct val="110000"/>
+              </a:lnSpc>
+              <a:buNone/>
+              <a:defRPr sz="1350" b="0">
                 <a:solidFill>
                   <a:srgbClr val="171717"/>
                 </a:solidFill>
                 <a:latin typeface="Arial"/>
                 <a:ea typeface="Arial"/>
                 <a:cs typeface="Arial"/>
-              </a:rPr>
-              <a:t>Жёсткие факты</a:t>
-            </a:r>
-          </a:p>
-          <a:p xmlns:a="http://schemas.openxmlformats.org/drawingml/2006/main">
-            <a:pPr algn="l">
-              <a:lnSpc>
-                <a:spcPct val="110000"/>
-              </a:lnSpc>
-              <a:buNone/>
-              <a:defRPr sz="1350" b="0">
-                <a:solidFill>
-                  <a:srgbClr val="171717"/>
-                </a:solidFill>
-                <a:latin typeface="Arial"/>
-                <a:ea typeface="Arial"/>
-                <a:cs typeface="Arial"/>
               </a:defRPr>
             </a:pPr>
             <a:r>
               <a:rPr sz="1350" b="0">
-                <a:solidFill>
-                  <a:srgbClr val="171717"/>
-                </a:solidFill>
-                <a:latin typeface="Arial"/>
-                <a:ea typeface="Arial"/>
-                <a:cs typeface="Arial"/>
-              </a:rPr>
-              <a:t>показываем отдельно.</a:t>
-            </a:r>
-          </a:p>
-        </p:txBody>
-      </p:sp>
-      <p:sp>
-        <p:nvSpPr>
-          <p:cNvPr id="20" name="">
-            <a:extLst xmlns:a="http://schemas.openxmlformats.org/drawingml/2006/main">
-              <a:ext uri="{FF2B5EF4-FFF2-40B4-BE49-F238E27FC236}">
-                <a16:creationId xmlns:a16="http://schemas.microsoft.com/office/drawing/2014/main" id="{071192CC-267E-426E-A212-86687344728C}"/>
-              </a:ext>
-            </a:extLst>
-          </p:cNvPr>
-          <p:cNvSpPr>
-            <a:spLocks xmlns:a="http://schemas.openxmlformats.org/drawingml/2006/main" noGrp="1"/>
-          </p:cNvSpPr>
-          <p:nvPr/>
-        </p:nvSpPr>
-        <p:spPr>
-          <a:xfrm xmlns:a="http://schemas.openxmlformats.org/drawingml/2006/main">
-            <a:off x="5924550" y="3476625"/>
+                <a:latin typeface="Arial"/>
+                <a:ea typeface="Arial"/>
+                <a:cs typeface="Arial"/>
+              </a:rPr>
+              <a:t>с доказательствами.</a:t>
+            </a:r>
+          </a:p>
+        </p:txBody>
+      </p:sp>
+      <p:sp>
+        <p:nvSpPr>
+          <p:cNvPr id="24" name="">
+            <a:extLst xmlns:a="http://schemas.openxmlformats.org/drawingml/2006/main">
+              <a:ext uri="{FF2B5EF4-FFF2-40B4-BE49-F238E27FC236}">
+                <a16:creationId xmlns:a16="http://schemas.microsoft.com/office/drawing/2014/main" id="{D297BF8A-9448-450A-9769-AC9EFBE80882}"/>
+              </a:ext>
+            </a:extLst>
+          </p:cNvPr>
+          <p:cNvSpPr>
+            <a:spLocks xmlns:a="http://schemas.openxmlformats.org/drawingml/2006/main" noGrp="1"/>
+          </p:cNvSpPr>
+          <p:nvPr/>
+        </p:nvSpPr>
+        <p:spPr>
+          <a:xfrm xmlns:a="http://schemas.openxmlformats.org/drawingml/2006/main">
+            <a:off x="8648700" y="3476625"/>
             <a:ext cx="19050" cy="1962150"/>
           </a:xfrm>
           <a:prstGeom xmlns:a="http://schemas.openxmlformats.org/drawingml/2006/main" prst="rect">
@@ -6063,21 +6017,21 @@
       </p:sp>
       <p:sp>
         <p:nvSpPr>
-          <p:cNvPr id="21" name="">
-            <a:extLst xmlns:a="http://schemas.openxmlformats.org/drawingml/2006/main">
-              <a:ext uri="{FF2B5EF4-FFF2-40B4-BE49-F238E27FC236}">
-                <a16:creationId xmlns:a16="http://schemas.microsoft.com/office/drawing/2014/main" id="{272F5804-FC75-431B-B564-B497A6C62B96}"/>
-              </a:ext>
-            </a:extLst>
-          </p:cNvPr>
-          <p:cNvSpPr>
-            <a:spLocks xmlns:a="http://schemas.openxmlformats.org/drawingml/2006/main" noGrp="1"/>
-          </p:cNvSpPr>
-          <p:nvPr/>
-        </p:nvSpPr>
-        <p:spPr>
-          <a:xfrm xmlns:a="http://schemas.openxmlformats.org/drawingml/2006/main">
-            <a:off x="6134100" y="3390900"/>
+          <p:cNvPr id="25" name="">
+            <a:extLst xmlns:a="http://schemas.openxmlformats.org/drawingml/2006/main">
+              <a:ext uri="{FF2B5EF4-FFF2-40B4-BE49-F238E27FC236}">
+                <a16:creationId xmlns:a16="http://schemas.microsoft.com/office/drawing/2014/main" id="{FE13FFF2-E51B-460A-A580-CD367DD36619}"/>
+              </a:ext>
+            </a:extLst>
+          </p:cNvPr>
+          <p:cNvSpPr>
+            <a:spLocks xmlns:a="http://schemas.openxmlformats.org/drawingml/2006/main" noGrp="1"/>
+          </p:cNvSpPr>
+          <p:nvPr/>
+        </p:nvSpPr>
+        <p:spPr>
+          <a:xfrm xmlns:a="http://schemas.openxmlformats.org/drawingml/2006/main">
+            <a:off x="8858250" y="3390900"/>
             <a:ext cx="857250" cy="514350"/>
           </a:xfrm>
           <a:prstGeom xmlns:a="http://schemas.openxmlformats.org/drawingml/2006/main" prst="rect">
@@ -6118,28 +6072,28 @@
                 <a:ea typeface="Georgia"/>
                 <a:cs typeface="Georgia"/>
               </a:rPr>
-              <a:t>03</a:t>
-            </a:r>
-          </a:p>
-        </p:txBody>
-      </p:sp>
-      <p:sp>
-        <p:nvSpPr>
-          <p:cNvPr id="22" name="">
-            <a:extLst xmlns:a="http://schemas.openxmlformats.org/drawingml/2006/main">
-              <a:ext uri="{FF2B5EF4-FFF2-40B4-BE49-F238E27FC236}">
-                <a16:creationId xmlns:a16="http://schemas.microsoft.com/office/drawing/2014/main" id="{13173D55-F4CF-4F03-8B37-C0E239164562}"/>
-              </a:ext>
-            </a:extLst>
-          </p:cNvPr>
-          <p:cNvSpPr>
-            <a:spLocks xmlns:a="http://schemas.openxmlformats.org/drawingml/2006/main" noGrp="1"/>
-          </p:cNvSpPr>
-          <p:nvPr/>
-        </p:nvSpPr>
-        <p:spPr>
-          <a:xfrm xmlns:a="http://schemas.openxmlformats.org/drawingml/2006/main">
-            <a:off x="6134100" y="4057650"/>
+              <a:t>04</a:t>
+            </a:r>
+          </a:p>
+        </p:txBody>
+      </p:sp>
+      <p:sp>
+        <p:nvSpPr>
+          <p:cNvPr id="26" name="">
+            <a:extLst xmlns:a="http://schemas.openxmlformats.org/drawingml/2006/main">
+              <a:ext uri="{FF2B5EF4-FFF2-40B4-BE49-F238E27FC236}">
+                <a16:creationId xmlns:a16="http://schemas.microsoft.com/office/drawing/2014/main" id="{72A406BA-7A90-40F5-9580-F0D26F0F769C}"/>
+              </a:ext>
+            </a:extLst>
+          </p:cNvPr>
+          <p:cNvSpPr>
+            <a:spLocks xmlns:a="http://schemas.openxmlformats.org/drawingml/2006/main" noGrp="1"/>
+          </p:cNvSpPr>
+          <p:nvPr/>
+        </p:nvSpPr>
+        <p:spPr>
+          <a:xfrm xmlns:a="http://schemas.openxmlformats.org/drawingml/2006/main">
+            <a:off x="8858250" y="4057650"/>
             <a:ext cx="2362200" cy="533400"/>
           </a:xfrm>
           <a:prstGeom xmlns:a="http://schemas.openxmlformats.org/drawingml/2006/main" prst="rect">
@@ -6173,35 +6127,56 @@
             </a:pPr>
             <a:r>
               <a:rPr sz="1650" b="1">
-                <a:solidFill>
-                  <a:srgbClr val="063F8C"/>
-                </a:solidFill>
                 <a:latin typeface="Georgia"/>
                 <a:ea typeface="Georgia"/>
                 <a:cs typeface="Georgia"/>
               </a:rPr>
-              <a:t>3–5 доказательств</a:t>
-            </a:r>
-          </a:p>
-        </p:txBody>
-      </p:sp>
-      <p:sp>
-        <p:nvSpPr>
-          <p:cNvPr id="23" name="">
-            <a:extLst xmlns:a="http://schemas.openxmlformats.org/drawingml/2006/main">
-              <a:ext uri="{FF2B5EF4-FFF2-40B4-BE49-F238E27FC236}">
-                <a16:creationId xmlns:a16="http://schemas.microsoft.com/office/drawing/2014/main" id="{0EC10A8C-F79B-4BA6-863E-D5403AD209B5}"/>
-              </a:ext>
-            </a:extLst>
-          </p:cNvPr>
-          <p:cNvSpPr>
-            <a:spLocks xmlns:a="http://schemas.openxmlformats.org/drawingml/2006/main" noGrp="1"/>
-          </p:cNvSpPr>
-          <p:nvPr/>
-        </p:nvSpPr>
-        <p:spPr>
-          <a:xfrm xmlns:a="http://schemas.openxmlformats.org/drawingml/2006/main">
-            <a:off x="6134100" y="4724400"/>
+              <a:t>Сравнение</a:t>
+            </a:r>
+          </a:p>
+          <a:p xmlns:a="http://schemas.openxmlformats.org/drawingml/2006/main">
+            <a:pPr algn="l">
+              <a:lnSpc>
+                <a:spcPct val="102000"/>
+              </a:lnSpc>
+              <a:buNone/>
+              <a:defRPr sz="1650" b="1">
+                <a:solidFill>
+                  <a:srgbClr val="063F8C"/>
+                </a:solidFill>
+                <a:latin typeface="Georgia"/>
+                <a:ea typeface="Georgia"/>
+                <a:cs typeface="Georgia"/>
+              </a:defRPr>
+            </a:pPr>
+            <a:r>
+              <a:rPr sz="1650" b="1">
+                <a:latin typeface="Georgia"/>
+                <a:ea typeface="Georgia"/>
+                <a:cs typeface="Georgia"/>
+              </a:rPr>
+              <a:t>контрагентов</a:t>
+            </a:r>
+          </a:p>
+        </p:txBody>
+      </p:sp>
+      <p:sp>
+        <p:nvSpPr>
+          <p:cNvPr id="27" name="">
+            <a:extLst xmlns:a="http://schemas.openxmlformats.org/drawingml/2006/main">
+              <a:ext uri="{FF2B5EF4-FFF2-40B4-BE49-F238E27FC236}">
+                <a16:creationId xmlns:a16="http://schemas.microsoft.com/office/drawing/2014/main" id="{298E7684-2EFB-40A5-A967-3E7583025B87}"/>
+              </a:ext>
+            </a:extLst>
+          </p:cNvPr>
+          <p:cNvSpPr>
+            <a:spLocks xmlns:a="http://schemas.openxmlformats.org/drawingml/2006/main" noGrp="1"/>
+          </p:cNvSpPr>
+          <p:nvPr/>
+        </p:nvSpPr>
+        <p:spPr>
+          <a:xfrm xmlns:a="http://schemas.openxmlformats.org/drawingml/2006/main">
+            <a:off x="8858250" y="4724400"/>
             <a:ext cx="2333625" cy="647700"/>
           </a:xfrm>
           <a:prstGeom xmlns:a="http://schemas.openxmlformats.org/drawingml/2006/main" prst="rect">
@@ -6235,69 +6210,63 @@
             </a:pPr>
             <a:r>
               <a:rPr sz="1350" b="0">
+                <a:latin typeface="Arial"/>
+                <a:ea typeface="Arial"/>
+                <a:cs typeface="Arial"/>
+              </a:rPr>
+              <a:t>Помогает выбрать</a:t>
+            </a:r>
+          </a:p>
+          <a:p xmlns:a="http://schemas.openxmlformats.org/drawingml/2006/main">
+            <a:pPr algn="l">
+              <a:lnSpc>
+                <a:spcPct val="110000"/>
+              </a:lnSpc>
+              <a:buNone/>
+              <a:defRPr sz="1350" b="0">
                 <a:solidFill>
                   <a:srgbClr val="171717"/>
                 </a:solidFill>
                 <a:latin typeface="Arial"/>
                 <a:ea typeface="Arial"/>
                 <a:cs typeface="Arial"/>
-              </a:rPr>
-              <a:t>Каждое — с fact_id</a:t>
-            </a:r>
-          </a:p>
-          <a:p xmlns:a="http://schemas.openxmlformats.org/drawingml/2006/main">
-            <a:pPr algn="l">
-              <a:lnSpc>
-                <a:spcPct val="110000"/>
-              </a:lnSpc>
-              <a:buNone/>
-              <a:defRPr sz="1350" b="0">
-                <a:solidFill>
-                  <a:srgbClr val="171717"/>
-                </a:solidFill>
-                <a:latin typeface="Arial"/>
-                <a:ea typeface="Arial"/>
-                <a:cs typeface="Arial"/>
               </a:defRPr>
             </a:pPr>
             <a:r>
               <a:rPr sz="1350" b="0">
-                <a:solidFill>
-                  <a:srgbClr val="171717"/>
-                </a:solidFill>
-                <a:latin typeface="Arial"/>
-                <a:ea typeface="Arial"/>
-                <a:cs typeface="Arial"/>
-              </a:rPr>
-              <a:t>и ссылкой на поле.</a:t>
-            </a:r>
-          </a:p>
-        </p:txBody>
-      </p:sp>
-      <p:sp>
-        <p:nvSpPr>
-          <p:cNvPr id="24" name="">
-            <a:extLst xmlns:a="http://schemas.openxmlformats.org/drawingml/2006/main">
-              <a:ext uri="{FF2B5EF4-FFF2-40B4-BE49-F238E27FC236}">
-                <a16:creationId xmlns:a16="http://schemas.microsoft.com/office/drawing/2014/main" id="{D297BF8A-9448-450A-9769-AC9EFBE80882}"/>
-              </a:ext>
-            </a:extLst>
-          </p:cNvPr>
-          <p:cNvSpPr>
-            <a:spLocks xmlns:a="http://schemas.openxmlformats.org/drawingml/2006/main" noGrp="1"/>
-          </p:cNvSpPr>
-          <p:nvPr/>
-        </p:nvSpPr>
-        <p:spPr>
-          <a:xfrm xmlns:a="http://schemas.openxmlformats.org/drawingml/2006/main">
-            <a:off x="8648700" y="3476625"/>
-            <a:ext cx="19050" cy="1962150"/>
+                <a:latin typeface="Arial"/>
+                <a:ea typeface="Arial"/>
+                <a:cs typeface="Arial"/>
+              </a:rPr>
+              <a:t>между вариантами.</a:t>
+            </a:r>
+          </a:p>
+        </p:txBody>
+      </p:sp>
+      <p:sp>
+        <p:nvSpPr>
+          <p:cNvPr id="28" name="">
+            <a:extLst xmlns:a="http://schemas.openxmlformats.org/drawingml/2006/main">
+              <a:ext uri="{FF2B5EF4-FFF2-40B4-BE49-F238E27FC236}">
+                <a16:creationId xmlns:a16="http://schemas.microsoft.com/office/drawing/2014/main" id="{7EA54DD9-226C-4648-9FCF-F8C72CBD3D76}"/>
+              </a:ext>
+            </a:extLst>
+          </p:cNvPr>
+          <p:cNvSpPr>
+            <a:spLocks xmlns:a="http://schemas.openxmlformats.org/drawingml/2006/main" noGrp="1"/>
+          </p:cNvSpPr>
+          <p:nvPr/>
+        </p:nvSpPr>
+        <p:spPr>
+          <a:xfrm xmlns:a="http://schemas.openxmlformats.org/drawingml/2006/main">
+            <a:off x="666750" y="5905500"/>
+            <a:ext cx="10858500" cy="47625"/>
           </a:xfrm>
           <a:prstGeom xmlns:a="http://schemas.openxmlformats.org/drawingml/2006/main" prst="rect">
             <a:avLst/>
           </a:prstGeom>
           <a:solidFill xmlns:a="http://schemas.openxmlformats.org/drawingml/2006/main">
-            <a:srgbClr val="D9D5CC"/>
+            <a:srgbClr val="169FDA"/>
           </a:solidFill>
           <a:ln xmlns:a="http://schemas.openxmlformats.org/drawingml/2006/main" w="0">
             <a:noFill/>
@@ -6307,22 +6276,22 @@
       </p:sp>
       <p:sp>
         <p:nvSpPr>
-          <p:cNvPr id="25" name="">
-            <a:extLst xmlns:a="http://schemas.openxmlformats.org/drawingml/2006/main">
-              <a:ext uri="{FF2B5EF4-FFF2-40B4-BE49-F238E27FC236}">
-                <a16:creationId xmlns:a16="http://schemas.microsoft.com/office/drawing/2014/main" id="{FE13FFF2-E51B-460A-A580-CD367DD36619}"/>
-              </a:ext>
-            </a:extLst>
-          </p:cNvPr>
-          <p:cNvSpPr>
-            <a:spLocks xmlns:a="http://schemas.openxmlformats.org/drawingml/2006/main" noGrp="1"/>
-          </p:cNvSpPr>
-          <p:nvPr/>
-        </p:nvSpPr>
-        <p:spPr>
-          <a:xfrm xmlns:a="http://schemas.openxmlformats.org/drawingml/2006/main">
-            <a:off x="8858250" y="3390900"/>
-            <a:ext cx="857250" cy="514350"/>
+          <p:cNvPr id="29" name="">
+            <a:extLst xmlns:a="http://schemas.openxmlformats.org/drawingml/2006/main">
+              <a:ext uri="{FF2B5EF4-FFF2-40B4-BE49-F238E27FC236}">
+                <a16:creationId xmlns:a16="http://schemas.microsoft.com/office/drawing/2014/main" id="{2E2B740B-29E1-48EC-B5E2-69A43CFB1B96}"/>
+              </a:ext>
+            </a:extLst>
+          </p:cNvPr>
+          <p:cNvSpPr>
+            <a:spLocks xmlns:a="http://schemas.openxmlformats.org/drawingml/2006/main" noGrp="1"/>
+          </p:cNvSpPr>
+          <p:nvPr/>
+        </p:nvSpPr>
+        <p:spPr>
+          <a:xfrm xmlns:a="http://schemas.openxmlformats.org/drawingml/2006/main">
+            <a:off x="685800" y="6124575"/>
+            <a:ext cx="9906000" cy="247650"/>
           </a:xfrm>
           <a:prstGeom xmlns:a="http://schemas.openxmlformats.org/drawingml/2006/main" prst="rect">
             <a:avLst/>
@@ -6344,250 +6313,6 @@
                 <a:spcPct val="100000"/>
               </a:lnSpc>
               <a:buNone/>
-              <a:defRPr sz="2850" b="1">
-                <a:solidFill>
-                  <a:srgbClr val="F6B800"/>
-                </a:solidFill>
-                <a:latin typeface="Georgia"/>
-                <a:ea typeface="Georgia"/>
-                <a:cs typeface="Georgia"/>
-              </a:defRPr>
-            </a:pPr>
-            <a:r>
-              <a:rPr sz="2850" b="1">
-                <a:solidFill>
-                  <a:srgbClr val="F6B800"/>
-                </a:solidFill>
-                <a:latin typeface="Georgia"/>
-                <a:ea typeface="Georgia"/>
-                <a:cs typeface="Georgia"/>
-              </a:rPr>
-              <a:t>04</a:t>
-            </a:r>
-          </a:p>
-        </p:txBody>
-      </p:sp>
-      <p:sp>
-        <p:nvSpPr>
-          <p:cNvPr id="26" name="">
-            <a:extLst xmlns:a="http://schemas.openxmlformats.org/drawingml/2006/main">
-              <a:ext uri="{FF2B5EF4-FFF2-40B4-BE49-F238E27FC236}">
-                <a16:creationId xmlns:a16="http://schemas.microsoft.com/office/drawing/2014/main" id="{72A406BA-7A90-40F5-9580-F0D26F0F769C}"/>
-              </a:ext>
-            </a:extLst>
-          </p:cNvPr>
-          <p:cNvSpPr>
-            <a:spLocks xmlns:a="http://schemas.openxmlformats.org/drawingml/2006/main" noGrp="1"/>
-          </p:cNvSpPr>
-          <p:nvPr/>
-        </p:nvSpPr>
-        <p:spPr>
-          <a:xfrm xmlns:a="http://schemas.openxmlformats.org/drawingml/2006/main">
-            <a:off x="8858250" y="4057650"/>
-            <a:ext cx="2362200" cy="533400"/>
-          </a:xfrm>
-          <a:prstGeom xmlns:a="http://schemas.openxmlformats.org/drawingml/2006/main" prst="rect">
-            <a:avLst/>
-          </a:prstGeom>
-          <a:noFill xmlns:a="http://schemas.openxmlformats.org/drawingml/2006/main"/>
-          <a:ln xmlns:a="http://schemas.openxmlformats.org/drawingml/2006/main" w="0">
-            <a:noFill/>
-            <a:prstDash val="solid"/>
-          </a:ln>
-        </p:spPr>
-        <p:txBody>
-          <a:bodyPr xmlns:a="http://schemas.openxmlformats.org/drawingml/2006/main" lIns="0" tIns="0" rIns="0" bIns="0" anchor="t">
-            <a:normAutofit fontScale="100000"/>
-          </a:bodyPr>
-          <a:lstStyle xmlns:a="http://schemas.openxmlformats.org/drawingml/2006/main"/>
-          <a:p xmlns:a="http://schemas.openxmlformats.org/drawingml/2006/main">
-            <a:pPr algn="l">
-              <a:lnSpc>
-                <a:spcPct val="102000"/>
-              </a:lnSpc>
-              <a:buNone/>
-              <a:defRPr sz="1650" b="1">
-                <a:solidFill>
-                  <a:srgbClr val="063F8C"/>
-                </a:solidFill>
-                <a:latin typeface="Georgia"/>
-                <a:ea typeface="Georgia"/>
-                <a:cs typeface="Georgia"/>
-              </a:defRPr>
-            </a:pPr>
-            <a:r>
-              <a:rPr sz="1650" b="1">
-                <a:solidFill>
-                  <a:srgbClr val="063F8C"/>
-                </a:solidFill>
-                <a:latin typeface="Georgia"/>
-                <a:ea typeface="Georgia"/>
-                <a:cs typeface="Georgia"/>
-              </a:rPr>
-              <a:t>Честное «нет данных»</a:t>
-            </a:r>
-          </a:p>
-        </p:txBody>
-      </p:sp>
-      <p:sp>
-        <p:nvSpPr>
-          <p:cNvPr id="27" name="">
-            <a:extLst xmlns:a="http://schemas.openxmlformats.org/drawingml/2006/main">
-              <a:ext uri="{FF2B5EF4-FFF2-40B4-BE49-F238E27FC236}">
-                <a16:creationId xmlns:a16="http://schemas.microsoft.com/office/drawing/2014/main" id="{298E7684-2EFB-40A5-A967-3E7583025B87}"/>
-              </a:ext>
-            </a:extLst>
-          </p:cNvPr>
-          <p:cNvSpPr>
-            <a:spLocks xmlns:a="http://schemas.openxmlformats.org/drawingml/2006/main" noGrp="1"/>
-          </p:cNvSpPr>
-          <p:nvPr/>
-        </p:nvSpPr>
-        <p:spPr>
-          <a:xfrm xmlns:a="http://schemas.openxmlformats.org/drawingml/2006/main">
-            <a:off x="8858250" y="4724400"/>
-            <a:ext cx="2333625" cy="647700"/>
-          </a:xfrm>
-          <a:prstGeom xmlns:a="http://schemas.openxmlformats.org/drawingml/2006/main" prst="rect">
-            <a:avLst/>
-          </a:prstGeom>
-          <a:noFill xmlns:a="http://schemas.openxmlformats.org/drawingml/2006/main"/>
-          <a:ln xmlns:a="http://schemas.openxmlformats.org/drawingml/2006/main" w="0">
-            <a:noFill/>
-            <a:prstDash val="solid"/>
-          </a:ln>
-        </p:spPr>
-        <p:txBody>
-          <a:bodyPr xmlns:a="http://schemas.openxmlformats.org/drawingml/2006/main" lIns="0" tIns="0" rIns="0" bIns="0" anchor="t">
-            <a:normAutofit fontScale="100000"/>
-          </a:bodyPr>
-          <a:lstStyle xmlns:a="http://schemas.openxmlformats.org/drawingml/2006/main"/>
-          <a:p xmlns:a="http://schemas.openxmlformats.org/drawingml/2006/main">
-            <a:pPr algn="l">
-              <a:lnSpc>
-                <a:spcPct val="110000"/>
-              </a:lnSpc>
-              <a:buNone/>
-              <a:defRPr sz="1350" b="0">
-                <a:solidFill>
-                  <a:srgbClr val="171717"/>
-                </a:solidFill>
-                <a:latin typeface="Arial"/>
-                <a:ea typeface="Arial"/>
-                <a:cs typeface="Arial"/>
-              </a:defRPr>
-            </a:pPr>
-            <a:r>
-              <a:rPr sz="1350" b="0">
-                <a:solidFill>
-                  <a:srgbClr val="171717"/>
-                </a:solidFill>
-                <a:latin typeface="Arial"/>
-                <a:ea typeface="Arial"/>
-                <a:cs typeface="Arial"/>
-              </a:rPr>
-              <a:t>Пустой блок не выглядит</a:t>
-            </a:r>
-          </a:p>
-          <a:p xmlns:a="http://schemas.openxmlformats.org/drawingml/2006/main">
-            <a:pPr algn="l">
-              <a:lnSpc>
-                <a:spcPct val="110000"/>
-              </a:lnSpc>
-              <a:buNone/>
-              <a:defRPr sz="1350" b="0">
-                <a:solidFill>
-                  <a:srgbClr val="171717"/>
-                </a:solidFill>
-                <a:latin typeface="Arial"/>
-                <a:ea typeface="Arial"/>
-                <a:cs typeface="Arial"/>
-              </a:defRPr>
-            </a:pPr>
-            <a:r>
-              <a:rPr sz="1350" b="0">
-                <a:solidFill>
-                  <a:srgbClr val="171717"/>
-                </a:solidFill>
-                <a:latin typeface="Arial"/>
-                <a:ea typeface="Arial"/>
-                <a:cs typeface="Arial"/>
-              </a:rPr>
-              <a:t>как безопасный.</a:t>
-            </a:r>
-          </a:p>
-        </p:txBody>
-      </p:sp>
-      <p:sp>
-        <p:nvSpPr>
-          <p:cNvPr id="28" name="">
-            <a:extLst xmlns:a="http://schemas.openxmlformats.org/drawingml/2006/main">
-              <a:ext uri="{FF2B5EF4-FFF2-40B4-BE49-F238E27FC236}">
-                <a16:creationId xmlns:a16="http://schemas.microsoft.com/office/drawing/2014/main" id="{7EA54DD9-226C-4648-9FCF-F8C72CBD3D76}"/>
-              </a:ext>
-            </a:extLst>
-          </p:cNvPr>
-          <p:cNvSpPr>
-            <a:spLocks xmlns:a="http://schemas.openxmlformats.org/drawingml/2006/main" noGrp="1"/>
-          </p:cNvSpPr>
-          <p:nvPr/>
-        </p:nvSpPr>
-        <p:spPr>
-          <a:xfrm xmlns:a="http://schemas.openxmlformats.org/drawingml/2006/main">
-            <a:off x="666750" y="5905500"/>
-            <a:ext cx="10858500" cy="47625"/>
-          </a:xfrm>
-          <a:prstGeom xmlns:a="http://schemas.openxmlformats.org/drawingml/2006/main" prst="rect">
-            <a:avLst/>
-          </a:prstGeom>
-          <a:solidFill xmlns:a="http://schemas.openxmlformats.org/drawingml/2006/main">
-            <a:srgbClr val="169FDA"/>
-          </a:solidFill>
-          <a:ln xmlns:a="http://schemas.openxmlformats.org/drawingml/2006/main" w="0">
-            <a:noFill/>
-            <a:prstDash val="solid"/>
-          </a:ln>
-        </p:spPr>
-      </p:sp>
-      <p:sp>
-        <p:nvSpPr>
-          <p:cNvPr id="29" name="">
-            <a:extLst xmlns:a="http://schemas.openxmlformats.org/drawingml/2006/main">
-              <a:ext uri="{FF2B5EF4-FFF2-40B4-BE49-F238E27FC236}">
-                <a16:creationId xmlns:a16="http://schemas.microsoft.com/office/drawing/2014/main" id="{2E2B740B-29E1-48EC-B5E2-69A43CFB1B96}"/>
-              </a:ext>
-            </a:extLst>
-          </p:cNvPr>
-          <p:cNvSpPr>
-            <a:spLocks xmlns:a="http://schemas.openxmlformats.org/drawingml/2006/main" noGrp="1"/>
-          </p:cNvSpPr>
-          <p:nvPr/>
-        </p:nvSpPr>
-        <p:spPr>
-          <a:xfrm xmlns:a="http://schemas.openxmlformats.org/drawingml/2006/main">
-            <a:off x="685800" y="6124575"/>
-            <a:ext cx="9906000" cy="247650"/>
-          </a:xfrm>
-          <a:prstGeom xmlns:a="http://schemas.openxmlformats.org/drawingml/2006/main" prst="rect">
-            <a:avLst/>
-          </a:prstGeom>
-          <a:noFill xmlns:a="http://schemas.openxmlformats.org/drawingml/2006/main"/>
-          <a:ln xmlns:a="http://schemas.openxmlformats.org/drawingml/2006/main" w="0">
-            <a:noFill/>
-            <a:prstDash val="solid"/>
-          </a:ln>
-        </p:spPr>
-        <p:txBody>
-          <a:bodyPr xmlns:a="http://schemas.openxmlformats.org/drawingml/2006/main" lIns="0" tIns="0" rIns="0" bIns="0" anchor="t">
-            <a:normAutofit fontScale="100000"/>
-          </a:bodyPr>
-          <a:lstStyle xmlns:a="http://schemas.openxmlformats.org/drawingml/2006/main"/>
-          <a:p xmlns:a="http://schemas.openxmlformats.org/drawingml/2006/main">
-            <a:pPr algn="l">
-              <a:lnSpc>
-                <a:spcPct val="100000"/>
-              </a:lnSpc>
-              <a:buNone/>
               <a:defRPr sz="1200" b="1">
                 <a:solidFill>
                   <a:srgbClr val="5F6470"/>
@@ -6599,14 +6324,11 @@
             </a:pPr>
             <a:r>
               <a:rPr sz="1200" b="1">
-                <a:solidFill>
-                  <a:srgbClr val="5F6470"/>
-                </a:solidFill>
-                <a:latin typeface="Arial"/>
-                <a:ea typeface="Arial"/>
-                <a:cs typeface="Arial"/>
-              </a:rPr>
-              <a:t>Не считаем собственный риск · не спорим с банком · не выдаём категоричный приговор</a:t>
+                <a:latin typeface="Arial"/>
+                <a:ea typeface="Arial"/>
+                <a:cs typeface="Arial"/>
+              </a:rPr>
+              <a:t>Быстрее понять главное · проверить доказательства · сравнить варианты</a:t>
             </a:r>
           </a:p>
         </p:txBody>
@@ -6801,6 +6523,7 @@
           <a:lstStyle xmlns:a="http://schemas.openxmlformats.org/drawingml/2006/main"/>
           <a:p xmlns:a="http://schemas.openxmlformats.org/drawingml/2006/main">
             <a:pPr algn="ctr">
+              <a:buNone/>
               <a:defRPr sz="975" b="1">
                 <a:solidFill>
                   <a:srgbClr val="171717"/>
@@ -6905,14 +6628,11 @@
             </a:pPr>
             <a:r>
               <a:rPr sz="3375" b="1">
-                <a:solidFill>
-                  <a:srgbClr val="063F8C"/>
-                </a:solidFill>
                 <a:latin typeface="Georgia"/>
                 <a:ea typeface="Georgia"/>
                 <a:cs typeface="Georgia"/>
               </a:rPr>
-              <a:t>LLM объясняет — код считает и проверяет</a:t>
+              <a:t>От отчёта — к проверенному ответу</a:t>
             </a:r>
           </a:p>
         </p:txBody>
@@ -6967,14 +6687,11 @@
             </a:pPr>
             <a:r>
               <a:rPr sz="1350" b="0">
-                <a:solidFill>
-                  <a:srgbClr val="5F6470"/>
-                </a:solidFill>
-                <a:latin typeface="Arial"/>
-                <a:ea typeface="Arial"/>
-                <a:cs typeface="Arial"/>
-              </a:rPr>
-              <a:t>Архитектура одного прохода по ИНН</a:t>
+                <a:latin typeface="Arial"/>
+                <a:ea typeface="Arial"/>
+                <a:cs typeface="Arial"/>
+              </a:rPr>
+              <a:t>Четыре этапа одного анализа по ИНН</a:t>
             </a:r>
           </a:p>
         </p:txBody>
@@ -7225,14 +6942,11 @@
             </a:pPr>
             <a:r>
               <a:rPr sz="1050" b="1">
-                <a:solidFill>
-                  <a:srgbClr val="E52B2F"/>
-                </a:solidFill>
-                <a:latin typeface="Arial"/>
-                <a:ea typeface="Arial"/>
-                <a:cs typeface="Arial"/>
-              </a:rPr>
-              <a:t>ДАННЫЕ</a:t>
+                <a:latin typeface="Arial"/>
+                <a:ea typeface="Arial"/>
+                <a:cs typeface="Arial"/>
+              </a:rPr>
+              <a:t>ОТЧЁТ</a:t>
             </a:r>
           </a:p>
         </p:txBody>
@@ -7253,8 +6967,8 @@
         </p:nvSpPr>
         <p:spPr>
           <a:xfrm xmlns:a="http://schemas.openxmlformats.org/drawingml/2006/main">
-            <a:off x="876300" y="3429000"/>
-            <a:ext cx="1409700" cy="514350"/>
+            <a:off x="876300" y="3390900"/>
+            <a:ext cx="1409700" cy="1123950"/>
           </a:xfrm>
           <a:prstGeom xmlns:a="http://schemas.openxmlformats.org/drawingml/2006/main" prst="rect">
             <a:avLst/>
@@ -7266,7 +6980,7 @@
           </a:ln>
         </p:spPr>
         <p:txBody>
-          <a:bodyPr xmlns:a="http://schemas.openxmlformats.org/drawingml/2006/main" lIns="0" tIns="0" rIns="0" bIns="0" anchor="t">
+          <a:bodyPr xmlns:a="http://schemas.openxmlformats.org/drawingml/2006/main" lIns="0" tIns="0" rIns="0" bIns="0" anchor="ctr">
             <a:normAutofit fontScale="100000"/>
           </a:bodyPr>
           <a:lstStyle xmlns:a="http://schemas.openxmlformats.org/drawingml/2006/main"/>
@@ -7286,104 +7000,12 @@
               </a:defRPr>
             </a:pPr>
             <a:r>
-              <a:rPr sz="1650" b="1">
-                <a:solidFill>
-                  <a:srgbClr val="063F8C"/>
-                </a:solidFill>
+              <a:rPr sz="1800" b="1">
                 <a:latin typeface="Georgia"/>
                 <a:ea typeface="Georgia"/>
                 <a:cs typeface="Georgia"/>
               </a:rPr>
-              <a:t>ИНН → карточка</a:t>
-            </a:r>
-          </a:p>
-        </p:txBody>
-      </p:sp>
-      <p:sp>
-        <p:nvSpPr>
-          <p:cNvPr id="15" name="">
-            <a:extLst xmlns:a="http://schemas.openxmlformats.org/drawingml/2006/main">
-              <a:ext uri="{FF2B5EF4-FFF2-40B4-BE49-F238E27FC236}">
-                <a16:creationId xmlns:a16="http://schemas.microsoft.com/office/drawing/2014/main" id="{6BDFBDDC-F8EC-477B-B880-B4CF4AB28DB6}"/>
-              </a:ext>
-            </a:extLst>
-          </p:cNvPr>
-          <p:cNvSpPr>
-            <a:spLocks xmlns:a="http://schemas.openxmlformats.org/drawingml/2006/main" noGrp="1"/>
-          </p:cNvSpPr>
-          <p:nvPr/>
-        </p:nvSpPr>
-        <p:spPr>
-          <a:xfrm xmlns:a="http://schemas.openxmlformats.org/drawingml/2006/main">
-            <a:off x="876300" y="4057650"/>
-            <a:ext cx="1409700" cy="523875"/>
-          </a:xfrm>
-          <a:prstGeom xmlns:a="http://schemas.openxmlformats.org/drawingml/2006/main" prst="rect">
-            <a:avLst/>
-          </a:prstGeom>
-          <a:noFill xmlns:a="http://schemas.openxmlformats.org/drawingml/2006/main"/>
-          <a:ln xmlns:a="http://schemas.openxmlformats.org/drawingml/2006/main" w="0">
-            <a:noFill/>
-            <a:prstDash val="solid"/>
-          </a:ln>
-        </p:spPr>
-        <p:txBody>
-          <a:bodyPr xmlns:a="http://schemas.openxmlformats.org/drawingml/2006/main" lIns="0" tIns="0" rIns="0" bIns="0" anchor="t">
-            <a:normAutofit fontScale="93121"/>
-          </a:bodyPr>
-          <a:lstStyle xmlns:a="http://schemas.openxmlformats.org/drawingml/2006/main"/>
-          <a:p xmlns:a="http://schemas.openxmlformats.org/drawingml/2006/main">
-            <a:pPr algn="l">
-              <a:lnSpc>
-                <a:spcPct val="108000"/>
-              </a:lnSpc>
-              <a:buNone/>
-              <a:defRPr sz="1275" b="0">
-                <a:solidFill>
-                  <a:srgbClr val="171717"/>
-                </a:solidFill>
-                <a:latin typeface="Arial"/>
-                <a:ea typeface="Arial"/>
-                <a:cs typeface="Arial"/>
-              </a:defRPr>
-            </a:pPr>
-            <a:r>
-              <a:rPr sz="1275" b="0">
-                <a:solidFill>
-                  <a:srgbClr val="171717"/>
-                </a:solidFill>
-                <a:latin typeface="Arial"/>
-                <a:ea typeface="Arial"/>
-                <a:cs typeface="Arial"/>
-              </a:rPr>
-              <a:t>Последний снапшот</a:t>
-            </a:r>
-          </a:p>
-          <a:p xmlns:a="http://schemas.openxmlformats.org/drawingml/2006/main">
-            <a:pPr algn="l">
-              <a:lnSpc>
-                <a:spcPct val="108000"/>
-              </a:lnSpc>
-              <a:buNone/>
-              <a:defRPr sz="1275" b="0">
-                <a:solidFill>
-                  <a:srgbClr val="171717"/>
-                </a:solidFill>
-                <a:latin typeface="Arial"/>
-                <a:ea typeface="Arial"/>
-                <a:cs typeface="Arial"/>
-              </a:defRPr>
-            </a:pPr>
-            <a:r>
-              <a:rPr sz="1275" b="0">
-                <a:solidFill>
-                  <a:srgbClr val="171717"/>
-                </a:solidFill>
-                <a:latin typeface="Arial"/>
-                <a:ea typeface="Arial"/>
-                <a:cs typeface="Arial"/>
-              </a:rPr>
-              <a:t>в PostgreSQL</a:t>
+              <a:t>Получаем отчёт</a:t>
             </a:r>
           </a:p>
         </p:txBody>
@@ -7535,14 +7157,11 @@
             </a:pPr>
             <a:r>
               <a:rPr sz="1050" b="1">
-                <a:solidFill>
-                  <a:srgbClr val="FFFFFF"/>
-                </a:solidFill>
-                <a:latin typeface="Arial"/>
-                <a:ea typeface="Arial"/>
-                <a:cs typeface="Arial"/>
-              </a:rPr>
-              <a:t>ФАКТЫ</a:t>
+                <a:latin typeface="Arial"/>
+                <a:ea typeface="Arial"/>
+                <a:cs typeface="Arial"/>
+              </a:rPr>
+              <a:t>ПОДГОТОВКА</a:t>
             </a:r>
           </a:p>
         </p:txBody>
@@ -7563,8 +7182,8 @@
         </p:nvSpPr>
         <p:spPr>
           <a:xfrm xmlns:a="http://schemas.openxmlformats.org/drawingml/2006/main">
-            <a:off x="3429000" y="3429000"/>
-            <a:ext cx="1638300" cy="514350"/>
+            <a:off x="3429000" y="3390900"/>
+            <a:ext cx="1638300" cy="1123950"/>
           </a:xfrm>
           <a:prstGeom xmlns:a="http://schemas.openxmlformats.org/drawingml/2006/main" prst="rect">
             <a:avLst/>
@@ -7576,7 +7195,7 @@
           </a:ln>
         </p:spPr>
         <p:txBody>
-          <a:bodyPr xmlns:a="http://schemas.openxmlformats.org/drawingml/2006/main" lIns="0" tIns="0" rIns="0" bIns="0" anchor="t">
+          <a:bodyPr xmlns:a="http://schemas.openxmlformats.org/drawingml/2006/main" lIns="0" tIns="0" rIns="0" bIns="0" anchor="ctr">
             <a:normAutofit fontScale="100000"/>
           </a:bodyPr>
           <a:lstStyle xmlns:a="http://schemas.openxmlformats.org/drawingml/2006/main"/>
@@ -7596,104 +7215,12 @@
               </a:defRPr>
             </a:pPr>
             <a:r>
-              <a:rPr sz="1650" b="1">
-                <a:solidFill>
-                  <a:srgbClr val="FFFFFF"/>
-                </a:solidFill>
+              <a:rPr sz="1800" b="1">
                 <a:latin typeface="Georgia"/>
                 <a:ea typeface="Georgia"/>
                 <a:cs typeface="Georgia"/>
               </a:rPr>
-              <a:t>Расчёты кодом</a:t>
-            </a:r>
-          </a:p>
-        </p:txBody>
-      </p:sp>
-      <p:sp>
-        <p:nvSpPr>
-          <p:cNvPr id="20" name="">
-            <a:extLst xmlns:a="http://schemas.openxmlformats.org/drawingml/2006/main">
-              <a:ext uri="{FF2B5EF4-FFF2-40B4-BE49-F238E27FC236}">
-                <a16:creationId xmlns:a16="http://schemas.microsoft.com/office/drawing/2014/main" id="{D6AEADDC-8EC2-438C-A442-2D63761C219B}"/>
-              </a:ext>
-            </a:extLst>
-          </p:cNvPr>
-          <p:cNvSpPr>
-            <a:spLocks xmlns:a="http://schemas.openxmlformats.org/drawingml/2006/main" noGrp="1"/>
-          </p:cNvSpPr>
-          <p:nvPr/>
-        </p:nvSpPr>
-        <p:spPr>
-          <a:xfrm xmlns:a="http://schemas.openxmlformats.org/drawingml/2006/main">
-            <a:off x="3429000" y="4057650"/>
-            <a:ext cx="1638300" cy="523875"/>
-          </a:xfrm>
-          <a:prstGeom xmlns:a="http://schemas.openxmlformats.org/drawingml/2006/main" prst="rect">
-            <a:avLst/>
-          </a:prstGeom>
-          <a:noFill xmlns:a="http://schemas.openxmlformats.org/drawingml/2006/main"/>
-          <a:ln xmlns:a="http://schemas.openxmlformats.org/drawingml/2006/main" w="0">
-            <a:noFill/>
-            <a:prstDash val="solid"/>
-          </a:ln>
-        </p:spPr>
-        <p:txBody>
-          <a:bodyPr xmlns:a="http://schemas.openxmlformats.org/drawingml/2006/main" lIns="0" tIns="0" rIns="0" bIns="0" anchor="t">
-            <a:normAutofit fontScale="100000"/>
-          </a:bodyPr>
-          <a:lstStyle xmlns:a="http://schemas.openxmlformats.org/drawingml/2006/main"/>
-          <a:p xmlns:a="http://schemas.openxmlformats.org/drawingml/2006/main">
-            <a:pPr algn="l">
-              <a:lnSpc>
-                <a:spcPct val="108000"/>
-              </a:lnSpc>
-              <a:buNone/>
-              <a:defRPr sz="1275" b="0">
-                <a:solidFill>
-                  <a:srgbClr val="FFFFFF"/>
-                </a:solidFill>
-                <a:latin typeface="Arial"/>
-                <a:ea typeface="Arial"/>
-                <a:cs typeface="Arial"/>
-              </a:defRPr>
-            </a:pPr>
-            <a:r>
-              <a:rPr sz="1275" b="0">
-                <a:solidFill>
-                  <a:srgbClr val="FFFFFF"/>
-                </a:solidFill>
-                <a:latin typeface="Arial"/>
-                <a:ea typeface="Arial"/>
-                <a:cs typeface="Arial"/>
-              </a:rPr>
-              <a:t>4 блока</a:t>
-            </a:r>
-          </a:p>
-          <a:p xmlns:a="http://schemas.openxmlformats.org/drawingml/2006/main">
-            <a:pPr algn="l">
-              <a:lnSpc>
-                <a:spcPct val="108000"/>
-              </a:lnSpc>
-              <a:buNone/>
-              <a:defRPr sz="1275" b="0">
-                <a:solidFill>
-                  <a:srgbClr val="FFFFFF"/>
-                </a:solidFill>
-                <a:latin typeface="Arial"/>
-                <a:ea typeface="Arial"/>
-                <a:cs typeface="Arial"/>
-              </a:defRPr>
-            </a:pPr>
-            <a:r>
-              <a:rPr sz="1275" b="0">
-                <a:solidFill>
-                  <a:srgbClr val="FFFFFF"/>
-                </a:solidFill>
-                <a:latin typeface="Arial"/>
-                <a:ea typeface="Arial"/>
-                <a:cs typeface="Arial"/>
-              </a:rPr>
-              <a:t>fact_id + field_ref</a:t>
+              <a:t>Код выделяет факты</a:t>
             </a:r>
           </a:p>
         </p:txBody>
@@ -7845,14 +7372,11 @@
             </a:pPr>
             <a:r>
               <a:rPr sz="1050" b="1">
-                <a:solidFill>
-                  <a:srgbClr val="E52B2F"/>
-                </a:solidFill>
-                <a:latin typeface="Arial"/>
-                <a:ea typeface="Arial"/>
-                <a:cs typeface="Arial"/>
-              </a:rPr>
-              <a:t>ИИ-АНАЛИЗ</a:t>
+                <a:latin typeface="Arial"/>
+                <a:ea typeface="Arial"/>
+                <a:cs typeface="Arial"/>
+              </a:rPr>
+              <a:t>АНАЛИЗ</a:t>
             </a:r>
           </a:p>
         </p:txBody>
@@ -7873,8 +7397,8 @@
         </p:nvSpPr>
         <p:spPr>
           <a:xfrm xmlns:a="http://schemas.openxmlformats.org/drawingml/2006/main">
-            <a:off x="6210300" y="3429000"/>
-            <a:ext cx="2190750" cy="514350"/>
+            <a:off x="6210300" y="3390900"/>
+            <a:ext cx="2190750" cy="1123950"/>
           </a:xfrm>
           <a:prstGeom xmlns:a="http://schemas.openxmlformats.org/drawingml/2006/main" prst="rect">
             <a:avLst/>
@@ -7886,7 +7410,7 @@
           </a:ln>
         </p:spPr>
         <p:txBody>
-          <a:bodyPr xmlns:a="http://schemas.openxmlformats.org/drawingml/2006/main" lIns="0" tIns="0" rIns="0" bIns="0" anchor="t">
+          <a:bodyPr xmlns:a="http://schemas.openxmlformats.org/drawingml/2006/main" lIns="0" tIns="0" rIns="0" bIns="0" anchor="ctr">
             <a:normAutofit fontScale="100000"/>
           </a:bodyPr>
           <a:lstStyle xmlns:a="http://schemas.openxmlformats.org/drawingml/2006/main"/>
@@ -7906,104 +7430,12 @@
               </a:defRPr>
             </a:pPr>
             <a:r>
-              <a:rPr sz="1650" b="1">
-                <a:solidFill>
-                  <a:srgbClr val="063F8C"/>
-                </a:solidFill>
+              <a:rPr sz="1800" b="1">
                 <a:latin typeface="Georgia"/>
                 <a:ea typeface="Georgia"/>
                 <a:cs typeface="Georgia"/>
               </a:rPr>
-              <a:t>4 агента параллельно</a:t>
-            </a:r>
-          </a:p>
-        </p:txBody>
-      </p:sp>
-      <p:sp>
-        <p:nvSpPr>
-          <p:cNvPr id="25" name="">
-            <a:extLst xmlns:a="http://schemas.openxmlformats.org/drawingml/2006/main">
-              <a:ext uri="{FF2B5EF4-FFF2-40B4-BE49-F238E27FC236}">
-                <a16:creationId xmlns:a16="http://schemas.microsoft.com/office/drawing/2014/main" id="{D6FD0CEB-97C8-47CA-85D9-D8EEFAB82CD1}"/>
-              </a:ext>
-            </a:extLst>
-          </p:cNvPr>
-          <p:cNvSpPr>
-            <a:spLocks xmlns:a="http://schemas.openxmlformats.org/drawingml/2006/main" noGrp="1"/>
-          </p:cNvSpPr>
-          <p:nvPr/>
-        </p:nvSpPr>
-        <p:spPr>
-          <a:xfrm xmlns:a="http://schemas.openxmlformats.org/drawingml/2006/main">
-            <a:off x="6210300" y="4057650"/>
-            <a:ext cx="2190750" cy="523875"/>
-          </a:xfrm>
-          <a:prstGeom xmlns:a="http://schemas.openxmlformats.org/drawingml/2006/main" prst="rect">
-            <a:avLst/>
-          </a:prstGeom>
-          <a:noFill xmlns:a="http://schemas.openxmlformats.org/drawingml/2006/main"/>
-          <a:ln xmlns:a="http://schemas.openxmlformats.org/drawingml/2006/main" w="0">
-            <a:noFill/>
-            <a:prstDash val="solid"/>
-          </a:ln>
-        </p:spPr>
-        <p:txBody>
-          <a:bodyPr xmlns:a="http://schemas.openxmlformats.org/drawingml/2006/main" lIns="0" tIns="0" rIns="0" bIns="0" anchor="t">
-            <a:normAutofit fontScale="89297"/>
-          </a:bodyPr>
-          <a:lstStyle xmlns:a="http://schemas.openxmlformats.org/drawingml/2006/main"/>
-          <a:p xmlns:a="http://schemas.openxmlformats.org/drawingml/2006/main">
-            <a:pPr algn="l">
-              <a:lnSpc>
-                <a:spcPct val="108000"/>
-              </a:lnSpc>
-              <a:buNone/>
-              <a:defRPr sz="1275" b="0">
-                <a:solidFill>
-                  <a:srgbClr val="171717"/>
-                </a:solidFill>
-                <a:latin typeface="Arial"/>
-                <a:ea typeface="Arial"/>
-                <a:cs typeface="Arial"/>
-              </a:defRPr>
-            </a:pPr>
-            <a:r>
-              <a:rPr sz="1275" b="0">
-                <a:solidFill>
-                  <a:srgbClr val="171717"/>
-                </a:solidFill>
-                <a:latin typeface="Arial"/>
-                <a:ea typeface="Arial"/>
-                <a:cs typeface="Arial"/>
-              </a:rPr>
-              <a:t>Кто это · риски · финансы · опыт</a:t>
-            </a:r>
-          </a:p>
-          <a:p xmlns:a="http://schemas.openxmlformats.org/drawingml/2006/main">
-            <a:pPr algn="l">
-              <a:lnSpc>
-                <a:spcPct val="108000"/>
-              </a:lnSpc>
-              <a:buNone/>
-              <a:defRPr sz="1275" b="0">
-                <a:solidFill>
-                  <a:srgbClr val="171717"/>
-                </a:solidFill>
-                <a:latin typeface="Arial"/>
-                <a:ea typeface="Arial"/>
-                <a:cs typeface="Arial"/>
-              </a:defRPr>
-            </a:pPr>
-            <a:r>
-              <a:rPr sz="1275" b="0">
-                <a:solidFill>
-                  <a:srgbClr val="171717"/>
-                </a:solidFill>
-                <a:latin typeface="Arial"/>
-                <a:ea typeface="Arial"/>
-                <a:cs typeface="Arial"/>
-              </a:rPr>
-              <a:t>→ Summary-LLM</a:t>
+              <a:t>4 агента анализируют блоки</a:t>
             </a:r>
           </a:p>
         </p:txBody>
@@ -8155,14 +7587,11 @@
             </a:pPr>
             <a:r>
               <a:rPr sz="1050" b="1">
-                <a:solidFill>
-                  <a:srgbClr val="E52B2F"/>
-                </a:solidFill>
-                <a:latin typeface="Arial"/>
-                <a:ea typeface="Arial"/>
-                <a:cs typeface="Arial"/>
-              </a:rPr>
-              <a:t>КОНТРОЛЬ</a:t>
+                <a:latin typeface="Arial"/>
+                <a:ea typeface="Arial"/>
+                <a:cs typeface="Arial"/>
+              </a:rPr>
+              <a:t>ИТОГ</a:t>
             </a:r>
           </a:p>
         </p:txBody>
@@ -8183,8 +7612,126 @@
         </p:nvSpPr>
         <p:spPr>
           <a:xfrm xmlns:a="http://schemas.openxmlformats.org/drawingml/2006/main">
-            <a:off x="9553575" y="3429000"/>
-            <a:ext cx="1762125" cy="514350"/>
+            <a:off x="9553575" y="3390900"/>
+            <a:ext cx="1762125" cy="1123950"/>
+          </a:xfrm>
+          <a:prstGeom xmlns:a="http://schemas.openxmlformats.org/drawingml/2006/main" prst="rect">
+            <a:avLst/>
+          </a:prstGeom>
+          <a:noFill xmlns:a="http://schemas.openxmlformats.org/drawingml/2006/main"/>
+          <a:ln xmlns:a="http://schemas.openxmlformats.org/drawingml/2006/main" w="0">
+            <a:noFill/>
+            <a:prstDash val="solid"/>
+          </a:ln>
+        </p:spPr>
+        <p:txBody>
+          <a:bodyPr xmlns:a="http://schemas.openxmlformats.org/drawingml/2006/main" lIns="0" tIns="0" rIns="0" bIns="0" anchor="ctr">
+            <a:normAutofit fontScale="100000"/>
+          </a:bodyPr>
+          <a:lstStyle xmlns:a="http://schemas.openxmlformats.org/drawingml/2006/main"/>
+          <a:p xmlns:a="http://schemas.openxmlformats.org/drawingml/2006/main">
+            <a:pPr algn="l">
+              <a:lnSpc>
+                <a:spcPct val="102000"/>
+              </a:lnSpc>
+              <a:buNone/>
+              <a:defRPr sz="1650" b="1">
+                <a:solidFill>
+                  <a:srgbClr val="063F8C"/>
+                </a:solidFill>
+                <a:latin typeface="Georgia"/>
+                <a:ea typeface="Georgia"/>
+                <a:cs typeface="Georgia"/>
+              </a:defRPr>
+            </a:pPr>
+            <a:r>
+              <a:rPr sz="1800" b="1">
+                <a:latin typeface="Georgia"/>
+                <a:ea typeface="Georgia"/>
+                <a:cs typeface="Georgia"/>
+              </a:rPr>
+              <a:t>Собираем проверенный итог</a:t>
+            </a:r>
+          </a:p>
+        </p:txBody>
+      </p:sp>
+      <p:sp>
+        <p:nvSpPr>
+          <p:cNvPr id="31" name="">
+            <a:extLst xmlns:a="http://schemas.openxmlformats.org/drawingml/2006/main">
+              <a:ext uri="{FF2B5EF4-FFF2-40B4-BE49-F238E27FC236}">
+                <a16:creationId xmlns:a16="http://schemas.microsoft.com/office/drawing/2014/main" id="{D5783BE7-0093-46F0-A598-9AAD22078D99}"/>
+              </a:ext>
+            </a:extLst>
+          </p:cNvPr>
+          <p:cNvSpPr>
+            <a:spLocks xmlns:a="http://schemas.openxmlformats.org/drawingml/2006/main" noGrp="1"/>
+          </p:cNvSpPr>
+          <p:nvPr/>
+        </p:nvSpPr>
+        <p:spPr>
+          <a:xfrm xmlns:a="http://schemas.openxmlformats.org/drawingml/2006/main">
+            <a:off x="666750" y="5219700"/>
+            <a:ext cx="2428875" cy="323850"/>
+          </a:xfrm>
+          <a:prstGeom xmlns:a="http://schemas.openxmlformats.org/drawingml/2006/main" prst="rect">
+            <a:avLst/>
+          </a:prstGeom>
+          <a:noFill xmlns:a="http://schemas.openxmlformats.org/drawingml/2006/main"/>
+          <a:ln xmlns:a="http://schemas.openxmlformats.org/drawingml/2006/main" w="0">
+            <a:noFill/>
+            <a:prstDash val="solid"/>
+          </a:ln>
+        </p:spPr>
+        <p:txBody>
+          <a:bodyPr xmlns:a="http://schemas.openxmlformats.org/drawingml/2006/main" lIns="0" tIns="0" rIns="0" bIns="0" anchor="t">
+            <a:normAutofit fontScale="94260"/>
+          </a:bodyPr>
+          <a:lstStyle xmlns:a="http://schemas.openxmlformats.org/drawingml/2006/main"/>
+          <a:p xmlns:a="http://schemas.openxmlformats.org/drawingml/2006/main">
+            <a:pPr algn="l">
+              <a:lnSpc>
+                <a:spcPct val="100000"/>
+              </a:lnSpc>
+              <a:buNone/>
+              <a:defRPr sz="1800" b="1">
+                <a:solidFill>
+                  <a:srgbClr val="063F8C"/>
+                </a:solidFill>
+                <a:latin typeface="Georgia"/>
+                <a:ea typeface="Georgia"/>
+                <a:cs typeface="Georgia"/>
+              </a:defRPr>
+            </a:pPr>
+            <a:r>
+              <a:rPr sz="1800" b="1">
+                <a:latin typeface="Georgia"/>
+                <a:ea typeface="Georgia"/>
+                <a:cs typeface="Georgia"/>
+              </a:rPr>
+              <a:t>Код выделяет факты</a:t>
+            </a:r>
+          </a:p>
+        </p:txBody>
+      </p:sp>
+      <p:sp>
+        <p:nvSpPr>
+          <p:cNvPr id="32" name="">
+            <a:extLst xmlns:a="http://schemas.openxmlformats.org/drawingml/2006/main">
+              <a:ext uri="{FF2B5EF4-FFF2-40B4-BE49-F238E27FC236}">
+                <a16:creationId xmlns:a16="http://schemas.microsoft.com/office/drawing/2014/main" id="{31E204DC-A69A-4844-9C86-2BD787DF11C6}"/>
+              </a:ext>
+            </a:extLst>
+          </p:cNvPr>
+          <p:cNvSpPr>
+            <a:spLocks xmlns:a="http://schemas.openxmlformats.org/drawingml/2006/main" noGrp="1"/>
+          </p:cNvSpPr>
+          <p:nvPr/>
+        </p:nvSpPr>
+        <p:spPr>
+          <a:xfrm xmlns:a="http://schemas.openxmlformats.org/drawingml/2006/main">
+            <a:off x="3952875" y="5219700"/>
+            <a:ext cx="2857500" cy="323850"/>
           </a:xfrm>
           <a:prstGeom xmlns:a="http://schemas.openxmlformats.org/drawingml/2006/main" prst="rect">
             <a:avLst/>
@@ -8203,12 +7750,12 @@
           <a:p xmlns:a="http://schemas.openxmlformats.org/drawingml/2006/main">
             <a:pPr algn="l">
               <a:lnSpc>
-                <a:spcPct val="102000"/>
-              </a:lnSpc>
-              <a:buNone/>
-              <a:defRPr sz="1650" b="1">
-                <a:solidFill>
-                  <a:srgbClr val="063F8C"/>
+                <a:spcPct val="100000"/>
+              </a:lnSpc>
+              <a:buNone/>
+              <a:defRPr sz="1800" b="1">
+                <a:solidFill>
+                  <a:srgbClr val="169FDA"/>
                 </a:solidFill>
                 <a:latin typeface="Georgia"/>
                 <a:ea typeface="Georgia"/>
@@ -8216,37 +7763,34 @@
               </a:defRPr>
             </a:pPr>
             <a:r>
-              <a:rPr sz="1650" b="1">
-                <a:solidFill>
-                  <a:srgbClr val="063F8C"/>
-                </a:solidFill>
+              <a:rPr sz="1800" b="1">
                 <a:latin typeface="Georgia"/>
                 <a:ea typeface="Georgia"/>
                 <a:cs typeface="Georgia"/>
               </a:rPr>
-              <a:t>Сверка fact_id</a:t>
-            </a:r>
-          </a:p>
-        </p:txBody>
-      </p:sp>
-      <p:sp>
-        <p:nvSpPr>
-          <p:cNvPr id="30" name="">
-            <a:extLst xmlns:a="http://schemas.openxmlformats.org/drawingml/2006/main">
-              <a:ext uri="{FF2B5EF4-FFF2-40B4-BE49-F238E27FC236}">
-                <a16:creationId xmlns:a16="http://schemas.microsoft.com/office/drawing/2014/main" id="{2A0DD660-148C-4A52-A27C-86875CAF62C6}"/>
-              </a:ext>
-            </a:extLst>
-          </p:cNvPr>
-          <p:cNvSpPr>
-            <a:spLocks xmlns:a="http://schemas.openxmlformats.org/drawingml/2006/main" noGrp="1"/>
-          </p:cNvSpPr>
-          <p:nvPr/>
-        </p:nvSpPr>
-        <p:spPr>
-          <a:xfrm xmlns:a="http://schemas.openxmlformats.org/drawingml/2006/main">
-            <a:off x="9553575" y="4057650"/>
-            <a:ext cx="1762125" cy="523875"/>
+              <a:t>LLM объясняет смысл</a:t>
+            </a:r>
+          </a:p>
+        </p:txBody>
+      </p:sp>
+      <p:sp>
+        <p:nvSpPr>
+          <p:cNvPr id="33" name="">
+            <a:extLst xmlns:a="http://schemas.openxmlformats.org/drawingml/2006/main">
+              <a:ext uri="{FF2B5EF4-FFF2-40B4-BE49-F238E27FC236}">
+                <a16:creationId xmlns:a16="http://schemas.microsoft.com/office/drawing/2014/main" id="{0735ACA7-C1EF-49B3-A70F-3AB0B9A20195}"/>
+              </a:ext>
+            </a:extLst>
+          </p:cNvPr>
+          <p:cNvSpPr>
+            <a:spLocks xmlns:a="http://schemas.openxmlformats.org/drawingml/2006/main" noGrp="1"/>
+          </p:cNvSpPr>
+          <p:nvPr/>
+        </p:nvSpPr>
+        <p:spPr>
+          <a:xfrm xmlns:a="http://schemas.openxmlformats.org/drawingml/2006/main">
+            <a:off x="7810500" y="5219700"/>
+            <a:ext cx="3476625" cy="323850"/>
           </a:xfrm>
           <a:prstGeom xmlns:a="http://schemas.openxmlformats.org/drawingml/2006/main" prst="rect">
             <a:avLst/>
@@ -8259,107 +7803,18 @@
         </p:spPr>
         <p:txBody>
           <a:bodyPr xmlns:a="http://schemas.openxmlformats.org/drawingml/2006/main" lIns="0" tIns="0" rIns="0" bIns="0" anchor="t">
-            <a:normAutofit fontScale="100000"/>
+            <a:normAutofit fontScale="93410"/>
           </a:bodyPr>
           <a:lstStyle xmlns:a="http://schemas.openxmlformats.org/drawingml/2006/main"/>
           <a:p xmlns:a="http://schemas.openxmlformats.org/drawingml/2006/main">
             <a:pPr algn="l">
               <a:lnSpc>
-                <a:spcPct val="108000"/>
-              </a:lnSpc>
-              <a:buNone/>
-              <a:defRPr sz="1275" b="0">
-                <a:solidFill>
-                  <a:srgbClr val="171717"/>
-                </a:solidFill>
-                <a:latin typeface="Arial"/>
-                <a:ea typeface="Arial"/>
-                <a:cs typeface="Arial"/>
-              </a:defRPr>
-            </a:pPr>
-            <a:r>
-              <a:rPr sz="1275" b="0">
-                <a:solidFill>
-                  <a:srgbClr val="171717"/>
-                </a:solidFill>
-                <a:latin typeface="Arial"/>
-                <a:ea typeface="Arial"/>
-                <a:cs typeface="Arial"/>
-              </a:rPr>
-              <a:t>guardrails</a:t>
-            </a:r>
-          </a:p>
-          <a:p xmlns:a="http://schemas.openxmlformats.org/drawingml/2006/main">
-            <a:pPr algn="l">
-              <a:lnSpc>
-                <a:spcPct val="108000"/>
-              </a:lnSpc>
-              <a:buNone/>
-              <a:defRPr sz="1275" b="0">
-                <a:solidFill>
-                  <a:srgbClr val="171717"/>
-                </a:solidFill>
-                <a:latin typeface="Arial"/>
-                <a:ea typeface="Arial"/>
-                <a:cs typeface="Arial"/>
-              </a:defRPr>
-            </a:pPr>
-            <a:r>
-              <a:rPr sz="1275" b="0">
-                <a:solidFill>
-                  <a:srgbClr val="171717"/>
-                </a:solidFill>
-                <a:latin typeface="Arial"/>
-                <a:ea typeface="Arial"/>
-                <a:cs typeface="Arial"/>
-              </a:rPr>
-              <a:t>→ API и экран отчёта</a:t>
-            </a:r>
-          </a:p>
-        </p:txBody>
-      </p:sp>
-      <p:sp>
-        <p:nvSpPr>
-          <p:cNvPr id="31" name="">
-            <a:extLst xmlns:a="http://schemas.openxmlformats.org/drawingml/2006/main">
-              <a:ext uri="{FF2B5EF4-FFF2-40B4-BE49-F238E27FC236}">
-                <a16:creationId xmlns:a16="http://schemas.microsoft.com/office/drawing/2014/main" id="{D5783BE7-0093-46F0-A598-9AAD22078D99}"/>
-              </a:ext>
-            </a:extLst>
-          </p:cNvPr>
-          <p:cNvSpPr>
-            <a:spLocks xmlns:a="http://schemas.openxmlformats.org/drawingml/2006/main" noGrp="1"/>
-          </p:cNvSpPr>
-          <p:nvPr/>
-        </p:nvSpPr>
-        <p:spPr>
-          <a:xfrm xmlns:a="http://schemas.openxmlformats.org/drawingml/2006/main">
-            <a:off x="666750" y="5219700"/>
-            <a:ext cx="2428875" cy="323850"/>
-          </a:xfrm>
-          <a:prstGeom xmlns:a="http://schemas.openxmlformats.org/drawingml/2006/main" prst="rect">
-            <a:avLst/>
-          </a:prstGeom>
-          <a:noFill xmlns:a="http://schemas.openxmlformats.org/drawingml/2006/main"/>
-          <a:ln xmlns:a="http://schemas.openxmlformats.org/drawingml/2006/main" w="0">
-            <a:noFill/>
-            <a:prstDash val="solid"/>
-          </a:ln>
-        </p:spPr>
-        <p:txBody>
-          <a:bodyPr xmlns:a="http://schemas.openxmlformats.org/drawingml/2006/main" lIns="0" tIns="0" rIns="0" bIns="0" anchor="t">
-            <a:normAutofit fontScale="100000"/>
-          </a:bodyPr>
-          <a:lstStyle xmlns:a="http://schemas.openxmlformats.org/drawingml/2006/main"/>
-          <a:p xmlns:a="http://schemas.openxmlformats.org/drawingml/2006/main">
-            <a:pPr algn="l">
-              <a:lnSpc>
                 <a:spcPct val="100000"/>
               </a:lnSpc>
               <a:buNone/>
               <a:defRPr sz="1800" b="1">
                 <a:solidFill>
-                  <a:srgbClr val="063F8C"/>
+                  <a:srgbClr val="E52B2F"/>
                 </a:solidFill>
                 <a:latin typeface="Georgia"/>
                 <a:ea typeface="Georgia"/>
@@ -8368,138 +7823,11 @@
             </a:pPr>
             <a:r>
               <a:rPr sz="1800" b="1">
-                <a:solidFill>
-                  <a:srgbClr val="063F8C"/>
-                </a:solidFill>
                 <a:latin typeface="Georgia"/>
                 <a:ea typeface="Georgia"/>
                 <a:cs typeface="Georgia"/>
               </a:rPr>
-              <a:t>Код создаёт факт</a:t>
-            </a:r>
-          </a:p>
-        </p:txBody>
-      </p:sp>
-      <p:sp>
-        <p:nvSpPr>
-          <p:cNvPr id="32" name="">
-            <a:extLst xmlns:a="http://schemas.openxmlformats.org/drawingml/2006/main">
-              <a:ext uri="{FF2B5EF4-FFF2-40B4-BE49-F238E27FC236}">
-                <a16:creationId xmlns:a16="http://schemas.microsoft.com/office/drawing/2014/main" id="{31E204DC-A69A-4844-9C86-2BD787DF11C6}"/>
-              </a:ext>
-            </a:extLst>
-          </p:cNvPr>
-          <p:cNvSpPr>
-            <a:spLocks xmlns:a="http://schemas.openxmlformats.org/drawingml/2006/main" noGrp="1"/>
-          </p:cNvSpPr>
-          <p:nvPr/>
-        </p:nvSpPr>
-        <p:spPr>
-          <a:xfrm xmlns:a="http://schemas.openxmlformats.org/drawingml/2006/main">
-            <a:off x="3952875" y="5219700"/>
-            <a:ext cx="2857500" cy="323850"/>
-          </a:xfrm>
-          <a:prstGeom xmlns:a="http://schemas.openxmlformats.org/drawingml/2006/main" prst="rect">
-            <a:avLst/>
-          </a:prstGeom>
-          <a:noFill xmlns:a="http://schemas.openxmlformats.org/drawingml/2006/main"/>
-          <a:ln xmlns:a="http://schemas.openxmlformats.org/drawingml/2006/main" w="0">
-            <a:noFill/>
-            <a:prstDash val="solid"/>
-          </a:ln>
-        </p:spPr>
-        <p:txBody>
-          <a:bodyPr xmlns:a="http://schemas.openxmlformats.org/drawingml/2006/main" lIns="0" tIns="0" rIns="0" bIns="0" anchor="t">
-            <a:normAutofit fontScale="100000"/>
-          </a:bodyPr>
-          <a:lstStyle xmlns:a="http://schemas.openxmlformats.org/drawingml/2006/main"/>
-          <a:p xmlns:a="http://schemas.openxmlformats.org/drawingml/2006/main">
-            <a:pPr algn="l">
-              <a:lnSpc>
-                <a:spcPct val="100000"/>
-              </a:lnSpc>
-              <a:buNone/>
-              <a:defRPr sz="1800" b="1">
-                <a:solidFill>
-                  <a:srgbClr val="169FDA"/>
-                </a:solidFill>
-                <a:latin typeface="Georgia"/>
-                <a:ea typeface="Georgia"/>
-                <a:cs typeface="Georgia"/>
-              </a:defRPr>
-            </a:pPr>
-            <a:r>
-              <a:rPr sz="1800" b="1">
-                <a:solidFill>
-                  <a:srgbClr val="169FDA"/>
-                </a:solidFill>
-                <a:latin typeface="Georgia"/>
-                <a:ea typeface="Georgia"/>
-                <a:cs typeface="Georgia"/>
-              </a:rPr>
-              <a:t>LLM только объясняет</a:t>
-            </a:r>
-          </a:p>
-        </p:txBody>
-      </p:sp>
-      <p:sp>
-        <p:nvSpPr>
-          <p:cNvPr id="33" name="">
-            <a:extLst xmlns:a="http://schemas.openxmlformats.org/drawingml/2006/main">
-              <a:ext uri="{FF2B5EF4-FFF2-40B4-BE49-F238E27FC236}">
-                <a16:creationId xmlns:a16="http://schemas.microsoft.com/office/drawing/2014/main" id="{0735ACA7-C1EF-49B3-A70F-3AB0B9A20195}"/>
-              </a:ext>
-            </a:extLst>
-          </p:cNvPr>
-          <p:cNvSpPr>
-            <a:spLocks xmlns:a="http://schemas.openxmlformats.org/drawingml/2006/main" noGrp="1"/>
-          </p:cNvSpPr>
-          <p:nvPr/>
-        </p:nvSpPr>
-        <p:spPr>
-          <a:xfrm xmlns:a="http://schemas.openxmlformats.org/drawingml/2006/main">
-            <a:off x="7810500" y="5219700"/>
-            <a:ext cx="3476625" cy="323850"/>
-          </a:xfrm>
-          <a:prstGeom xmlns:a="http://schemas.openxmlformats.org/drawingml/2006/main" prst="rect">
-            <a:avLst/>
-          </a:prstGeom>
-          <a:noFill xmlns:a="http://schemas.openxmlformats.org/drawingml/2006/main"/>
-          <a:ln xmlns:a="http://schemas.openxmlformats.org/drawingml/2006/main" w="0">
-            <a:noFill/>
-            <a:prstDash val="solid"/>
-          </a:ln>
-        </p:spPr>
-        <p:txBody>
-          <a:bodyPr xmlns:a="http://schemas.openxmlformats.org/drawingml/2006/main" lIns="0" tIns="0" rIns="0" bIns="0" anchor="t">
-            <a:normAutofit fontScale="100000"/>
-          </a:bodyPr>
-          <a:lstStyle xmlns:a="http://schemas.openxmlformats.org/drawingml/2006/main"/>
-          <a:p xmlns:a="http://schemas.openxmlformats.org/drawingml/2006/main">
-            <a:pPr algn="l">
-              <a:lnSpc>
-                <a:spcPct val="100000"/>
-              </a:lnSpc>
-              <a:buNone/>
-              <a:defRPr sz="1800" b="1">
-                <a:solidFill>
-                  <a:srgbClr val="E52B2F"/>
-                </a:solidFill>
-                <a:latin typeface="Georgia"/>
-                <a:ea typeface="Georgia"/>
-                <a:cs typeface="Georgia"/>
-              </a:defRPr>
-            </a:pPr>
-            <a:r>
-              <a:rPr sz="1800" b="1">
-                <a:solidFill>
-                  <a:srgbClr val="E52B2F"/>
-                </a:solidFill>
-                <a:latin typeface="Georgia"/>
-                <a:ea typeface="Georgia"/>
-                <a:cs typeface="Georgia"/>
-              </a:rPr>
-              <a:t>Сервис проверяет ссылку</a:t>
+              <a:t>Ответ сверяется с источником</a:t>
             </a:r>
           </a:p>
         </p:txBody>
@@ -8787,6 +8115,7 @@
           <a:lstStyle xmlns:a="http://schemas.openxmlformats.org/drawingml/2006/main"/>
           <a:p xmlns:a="http://schemas.openxmlformats.org/drawingml/2006/main">
             <a:pPr algn="ctr">
+              <a:buNone/>
               <a:defRPr sz="975" b="1">
                 <a:solidFill>
                   <a:srgbClr val="171717"/>
@@ -8871,7 +8200,7 @@
         </p:spPr>
         <p:txBody>
           <a:bodyPr xmlns:a="http://schemas.openxmlformats.org/drawingml/2006/main" lIns="0" tIns="0" rIns="0" bIns="0" anchor="t">
-            <a:normAutofit fontScale="93132"/>
+            <a:normAutofit fontScale="100000"/>
           </a:bodyPr>
           <a:lstStyle xmlns:a="http://schemas.openxmlformats.org/drawingml/2006/main"/>
           <a:p xmlns:a="http://schemas.openxmlformats.org/drawingml/2006/main">
@@ -8891,14 +8220,11 @@
             </a:pPr>
             <a:r>
               <a:rPr sz="3150" b="1">
-                <a:solidFill>
-                  <a:srgbClr val="063F8C"/>
-                </a:solidFill>
                 <a:latin typeface="Georgia"/>
                 <a:ea typeface="Georgia"/>
                 <a:cs typeface="Georgia"/>
               </a:rPr>
-              <a:t>Прототип работает сквозным потоком — качество уже измеряется</a:t>
+              <a:t>Прототип уже работает</a:t>
             </a:r>
           </a:p>
         </p:txBody>
